--- a/presentation/maximov-1300.pptx
+++ b/presentation/maximov-1300.pptx
@@ -1658,7 +1658,7 @@
     <p:bg>
       <p:bgPr>
         <a:solidFill>
-          <a:srgbClr val="12151C"/>
+          <a:srgbClr val="FFFFFF"/>
         </a:solidFill>
       </p:bgPr>
     </p:bg>
@@ -1684,14 +1684,14 @@
         </p:nvSpPr>
         <p:spPr>
           <a:xfrm>
-            <a:off x="0" y="0"/>
-            <a:ext cx="109728" cy="6858000"/>
+            <a:off x="502920" y="6446520"/>
+            <a:ext cx="11155680" cy="9144"/>
           </a:xfrm>
           <a:prstGeom prst="rect">
             <a:avLst/>
           </a:prstGeom>
           <a:solidFill>
-            <a:srgbClr val="E8C39E"/>
+            <a:srgbClr val="D9D4CC"/>
           </a:solidFill>
           <a:ln/>
         </p:spPr>
@@ -1704,34 +1704,34 @@
         </p:nvSpPr>
         <p:spPr>
           <a:xfrm>
-            <a:off x="411480" y="6510528"/>
-            <a:ext cx="7315200" cy="219456"/>
-          </a:xfrm>
-          <a:prstGeom prst="rect">
-            <a:avLst/>
-          </a:prstGeom>
-          <a:noFill/>
-          <a:ln/>
-        </p:spPr>
-        <p:txBody>
-          <a:bodyPr wrap="square" lIns="0" tIns="0" rIns="0" bIns="0" rtlCol="0" anchor="ctr"/>
-          <a:lstStyle/>
-          <a:p>
-            <a:pPr indent="0" marL="0">
-              <a:buNone/>
-            </a:pPr>
-            <a:r>
-              <a:rPr lang="en-US" sz="1100" dirty="0">
-                <a:solidFill>
-                  <a:srgbClr val="9AA3B2"/>
-                </a:solidFill>
-                <a:latin typeface="Calibri" pitchFamily="34" charset="0"/>
-                <a:ea typeface="Calibri" pitchFamily="34" charset="-122"/>
-                <a:cs typeface="Calibri" pitchFamily="34" charset="-120"/>
-              </a:rPr>
-              <a:t>t.me/yury/1300  ·  7 октября 2026</a:t>
-            </a:r>
-            <a:endParaRPr lang="en-US" sz="1100" dirty="0"/>
+            <a:off x="502920" y="6510528"/>
+            <a:ext cx="5486400" cy="219456"/>
+          </a:xfrm>
+          <a:prstGeom prst="rect">
+            <a:avLst/>
+          </a:prstGeom>
+          <a:noFill/>
+          <a:ln/>
+        </p:spPr>
+        <p:txBody>
+          <a:bodyPr wrap="square" lIns="0" tIns="0" rIns="0" bIns="0" rtlCol="0" anchor="ctr"/>
+          <a:lstStyle/>
+          <a:p>
+            <a:pPr indent="0" marL="0">
+              <a:buNone/>
+            </a:pPr>
+            <a:r>
+              <a:rPr lang="en-US" sz="1200" dirty="0">
+                <a:solidFill>
+                  <a:srgbClr val="5E6670"/>
+                </a:solidFill>
+                <a:latin typeface="Calibri" pitchFamily="34" charset="0"/>
+                <a:ea typeface="Calibri" pitchFamily="34" charset="-122"/>
+                <a:cs typeface="Calibri" pitchFamily="34" charset="-120"/>
+              </a:rPr>
+              <a:t>t.me/yury/1300</a:t>
+            </a:r>
+            <a:endParaRPr lang="en-US" sz="1200" dirty="0"/>
           </a:p>
         </p:txBody>
       </p:sp>
@@ -1743,8 +1743,8 @@
         </p:nvSpPr>
         <p:spPr>
           <a:xfrm>
-            <a:off x="10424160" y="6510528"/>
-            <a:ext cx="1280160" cy="219456"/>
+            <a:off x="9418320" y="6510528"/>
+            <a:ext cx="2240280" cy="219456"/>
           </a:xfrm>
           <a:prstGeom prst="rect">
             <a:avLst/>
@@ -1760,9 +1760,9 @@
               <a:buNone/>
             </a:pPr>
             <a:r>
-              <a:rPr lang="en-US" sz="1100" dirty="0">
-                <a:solidFill>
-                  <a:srgbClr val="9AA3B2"/>
+              <a:rPr lang="en-US" sz="1200" dirty="0">
+                <a:solidFill>
+                  <a:srgbClr val="5E6670"/>
                 </a:solidFill>
                 <a:latin typeface="Calibri" pitchFamily="34" charset="0"/>
                 <a:ea typeface="Calibri" pitchFamily="34" charset="-122"/>
@@ -1770,7 +1770,7 @@
               </a:rPr>
               <a:t>1 / 10</a:t>
             </a:r>
-            <a:endParaRPr lang="en-US" sz="1100" dirty="0"/>
+            <a:endParaRPr lang="en-US" sz="1200" dirty="0"/>
           </a:p>
         </p:txBody>
       </p:sp>
@@ -1782,34 +1782,34 @@
         </p:nvSpPr>
         <p:spPr>
           <a:xfrm>
-            <a:off x="502920" y="1417320"/>
-            <a:ext cx="9144000" cy="274320"/>
-          </a:xfrm>
-          <a:prstGeom prst="rect">
-            <a:avLst/>
-          </a:prstGeom>
-          <a:noFill/>
-          <a:ln/>
-        </p:spPr>
-        <p:txBody>
-          <a:bodyPr wrap="square" lIns="0" tIns="0" rIns="0" bIns="0" rtlCol="0" anchor="ctr"/>
-          <a:lstStyle/>
-          <a:p>
-            <a:pPr indent="0" marL="0">
-              <a:buNone/>
-            </a:pPr>
-            <a:r>
-              <a:rPr lang="en-US" sz="1300" spc="140" kern="0" dirty="0">
-                <a:solidFill>
-                  <a:srgbClr val="E8C39E"/>
-                </a:solidFill>
-                <a:latin typeface="Calibri" pitchFamily="34" charset="0"/>
-                <a:ea typeface="Calibri" pitchFamily="34" charset="-122"/>
-                <a:cs typeface="Calibri" pitchFamily="34" charset="-120"/>
-              </a:rPr>
-              <a:t>РАЗБОР ВЫСКАЗЫВАНИЯ</a:t>
-            </a:r>
-            <a:endParaRPr lang="en-US" sz="1300" dirty="0"/>
+            <a:off x="640080" y="1691640"/>
+            <a:ext cx="10058400" cy="292608"/>
+          </a:xfrm>
+          <a:prstGeom prst="rect">
+            <a:avLst/>
+          </a:prstGeom>
+          <a:noFill/>
+          <a:ln/>
+        </p:spPr>
+        <p:txBody>
+          <a:bodyPr wrap="square" lIns="0" tIns="0" rIns="0" bIns="0" rtlCol="0" anchor="ctr"/>
+          <a:lstStyle/>
+          <a:p>
+            <a:pPr indent="0" marL="0">
+              <a:buNone/>
+            </a:pPr>
+            <a:r>
+              <a:rPr lang="en-US" sz="1600" dirty="0">
+                <a:solidFill>
+                  <a:srgbClr val="1F4B6E"/>
+                </a:solidFill>
+                <a:latin typeface="Calibri" pitchFamily="34" charset="0"/>
+                <a:ea typeface="Calibri" pitchFamily="34" charset="-122"/>
+                <a:cs typeface="Calibri" pitchFamily="34" charset="-120"/>
+              </a:rPr>
+              <a:t>Разбор высказывания</a:t>
+            </a:r>
+            <a:endParaRPr lang="en-US" sz="1600" dirty="0"/>
           </a:p>
         </p:txBody>
       </p:sp>
@@ -1821,8 +1821,8 @@
         </p:nvSpPr>
         <p:spPr>
           <a:xfrm>
-            <a:off x="502920" y="1828800"/>
-            <a:ext cx="10515600" cy="1920240"/>
+            <a:off x="640080" y="2103120"/>
+            <a:ext cx="10515600" cy="1737360"/>
           </a:xfrm>
           <a:prstGeom prst="rect">
             <a:avLst/>
@@ -1840,13 +1840,13 @@
             <a:r>
               <a:rPr lang="en-US" sz="4000" dirty="0">
                 <a:solidFill>
-                  <a:srgbClr val="F4F1EA"/>
+                  <a:srgbClr val="1C1C1C"/>
                 </a:solidFill>
                 <a:latin typeface="Georgia" pitchFamily="34" charset="0"/>
                 <a:ea typeface="Georgia" pitchFamily="34" charset="-122"/>
                 <a:cs typeface="Georgia" pitchFamily="34" charset="-120"/>
               </a:rPr>
-              <a:t>Верность машины</a:t>
+              <a:t>Верность машины поручению</a:t>
             </a:r>
             <a:endParaRPr lang="en-US" sz="4000" dirty="0"/>
           </a:p>
@@ -1857,13 +1857,13 @@
             <a:r>
               <a:rPr lang="en-US" sz="4000" dirty="0">
                 <a:solidFill>
-                  <a:srgbClr val="F4F1EA"/>
+                  <a:srgbClr val="1C1C1C"/>
                 </a:solidFill>
                 <a:latin typeface="Georgia" pitchFamily="34" charset="0"/>
                 <a:ea typeface="Georgia" pitchFamily="34" charset="-122"/>
                 <a:cs typeface="Georgia" pitchFamily="34" charset="-120"/>
               </a:rPr>
-              <a:t>поручению — не гарантия</a:t>
+              <a:t>не гарантия</a:t>
             </a:r>
             <a:endParaRPr lang="en-US" sz="4000" dirty="0"/>
           </a:p>
@@ -1877,7 +1877,7 @@
         </p:nvSpPr>
         <p:spPr>
           <a:xfrm>
-            <a:off x="502920" y="4023360"/>
+            <a:off x="640080" y="4114800"/>
             <a:ext cx="9144000" cy="640080"/>
           </a:xfrm>
           <a:prstGeom prst="rect">
@@ -1894,34 +1894,34 @@
               <a:buNone/>
             </a:pPr>
             <a:r>
-              <a:rPr lang="en-US" sz="1600" dirty="0">
-                <a:solidFill>
-                  <a:srgbClr val="9AA3B2"/>
-                </a:solidFill>
-                <a:latin typeface="Calibri" pitchFamily="34" charset="0"/>
-                <a:ea typeface="Calibri" pitchFamily="34" charset="-122"/>
-                <a:cs typeface="Calibri" pitchFamily="34" charset="-120"/>
-              </a:rPr>
-              <a:t>Юрий Максимов, «Максимов | ЗАПИСКИ», пост 1300.</a:t>
-            </a:r>
-            <a:endParaRPr lang="en-US" sz="1600" dirty="0"/>
-          </a:p>
-          <a:p>
-            <a:pPr indent="0" marL="0">
-              <a:buNone/>
-            </a:pPr>
-            <a:r>
-              <a:rPr lang="en-US" sz="1600" dirty="0">
-                <a:solidFill>
-                  <a:srgbClr val="9AA3B2"/>
-                </a:solidFill>
-                <a:latin typeface="Calibri" pitchFamily="34" charset="0"/>
-                <a:ea typeface="Calibri" pitchFamily="34" charset="-122"/>
-                <a:cs typeface="Calibri" pitchFamily="34" charset="-120"/>
-              </a:rPr>
-              <a:t>Форум «Цифровые решения», пленарная сессия, 7 октября 2026.</a:t>
-            </a:r>
-            <a:endParaRPr lang="en-US" sz="1600" dirty="0"/>
+              <a:rPr lang="en-US" sz="1800" dirty="0">
+                <a:solidFill>
+                  <a:srgbClr val="5E6670"/>
+                </a:solidFill>
+                <a:latin typeface="Calibri" pitchFamily="34" charset="0"/>
+                <a:ea typeface="Calibri" pitchFamily="34" charset="-122"/>
+                <a:cs typeface="Calibri" pitchFamily="34" charset="-120"/>
+              </a:rPr>
+              <a:t>Юрий Максимов, канал «Максимов | ЗАПИСКИ», пост 1300.</a:t>
+            </a:r>
+            <a:endParaRPr lang="en-US" sz="1800" dirty="0"/>
+          </a:p>
+          <a:p>
+            <a:pPr indent="0" marL="0">
+              <a:buNone/>
+            </a:pPr>
+            <a:r>
+              <a:rPr lang="en-US" sz="1800" dirty="0">
+                <a:solidFill>
+                  <a:srgbClr val="5E6670"/>
+                </a:solidFill>
+                <a:latin typeface="Calibri" pitchFamily="34" charset="0"/>
+                <a:ea typeface="Calibri" pitchFamily="34" charset="-122"/>
+                <a:cs typeface="Calibri" pitchFamily="34" charset="-120"/>
+              </a:rPr>
+              <a:t>Форум «Цифровые решения», 7 октября 2026.</a:t>
+            </a:r>
+            <a:endParaRPr lang="en-US" sz="1800" dirty="0"/>
           </a:p>
         </p:txBody>
       </p:sp>
@@ -1939,7 +1939,7 @@
     <p:bg>
       <p:bgPr>
         <a:solidFill>
-          <a:srgbClr val="12151C"/>
+          <a:srgbClr val="FFFFFF"/>
         </a:solidFill>
       </p:bgPr>
     </p:bg>
@@ -1965,14 +1965,14 @@
         </p:nvSpPr>
         <p:spPr>
           <a:xfrm>
-            <a:off x="0" y="0"/>
-            <a:ext cx="109728" cy="6858000"/>
+            <a:off x="502920" y="6446520"/>
+            <a:ext cx="11155680" cy="9144"/>
           </a:xfrm>
           <a:prstGeom prst="rect">
             <a:avLst/>
           </a:prstGeom>
           <a:solidFill>
-            <a:srgbClr val="E8C39E"/>
+            <a:srgbClr val="D9D4CC"/>
           </a:solidFill>
           <a:ln/>
         </p:spPr>
@@ -1985,34 +1985,34 @@
         </p:nvSpPr>
         <p:spPr>
           <a:xfrm>
-            <a:off x="411480" y="6510528"/>
-            <a:ext cx="7315200" cy="219456"/>
-          </a:xfrm>
-          <a:prstGeom prst="rect">
-            <a:avLst/>
-          </a:prstGeom>
-          <a:noFill/>
-          <a:ln/>
-        </p:spPr>
-        <p:txBody>
-          <a:bodyPr wrap="square" lIns="0" tIns="0" rIns="0" bIns="0" rtlCol="0" anchor="ctr"/>
-          <a:lstStyle/>
-          <a:p>
-            <a:pPr indent="0" marL="0">
-              <a:buNone/>
-            </a:pPr>
-            <a:r>
-              <a:rPr lang="en-US" sz="1100" dirty="0">
-                <a:solidFill>
-                  <a:srgbClr val="9AA3B2"/>
-                </a:solidFill>
-                <a:latin typeface="Calibri" pitchFamily="34" charset="0"/>
-                <a:ea typeface="Calibri" pitchFamily="34" charset="-122"/>
-                <a:cs typeface="Calibri" pitchFamily="34" charset="-120"/>
-              </a:rPr>
-              <a:t>t.me/yury/1300  ·  7 октября 2026</a:t>
-            </a:r>
-            <a:endParaRPr lang="en-US" sz="1100" dirty="0"/>
+            <a:off x="502920" y="6510528"/>
+            <a:ext cx="5486400" cy="219456"/>
+          </a:xfrm>
+          <a:prstGeom prst="rect">
+            <a:avLst/>
+          </a:prstGeom>
+          <a:noFill/>
+          <a:ln/>
+        </p:spPr>
+        <p:txBody>
+          <a:bodyPr wrap="square" lIns="0" tIns="0" rIns="0" bIns="0" rtlCol="0" anchor="ctr"/>
+          <a:lstStyle/>
+          <a:p>
+            <a:pPr indent="0" marL="0">
+              <a:buNone/>
+            </a:pPr>
+            <a:r>
+              <a:rPr lang="en-US" sz="1200" dirty="0">
+                <a:solidFill>
+                  <a:srgbClr val="5E6670"/>
+                </a:solidFill>
+                <a:latin typeface="Calibri" pitchFamily="34" charset="0"/>
+                <a:ea typeface="Calibri" pitchFamily="34" charset="-122"/>
+                <a:cs typeface="Calibri" pitchFamily="34" charset="-120"/>
+              </a:rPr>
+              <a:t>t.me/yury/1300</a:t>
+            </a:r>
+            <a:endParaRPr lang="en-US" sz="1200" dirty="0"/>
           </a:p>
         </p:txBody>
       </p:sp>
@@ -2024,8 +2024,8 @@
         </p:nvSpPr>
         <p:spPr>
           <a:xfrm>
-            <a:off x="10424160" y="6510528"/>
-            <a:ext cx="1280160" cy="219456"/>
+            <a:off x="9418320" y="6510528"/>
+            <a:ext cx="2240280" cy="219456"/>
           </a:xfrm>
           <a:prstGeom prst="rect">
             <a:avLst/>
@@ -2041,9 +2041,9 @@
               <a:buNone/>
             </a:pPr>
             <a:r>
-              <a:rPr lang="en-US" sz="1100" dirty="0">
-                <a:solidFill>
-                  <a:srgbClr val="9AA3B2"/>
+              <a:rPr lang="en-US" sz="1200" dirty="0">
+                <a:solidFill>
+                  <a:srgbClr val="5E6670"/>
                 </a:solidFill>
                 <a:latin typeface="Calibri" pitchFamily="34" charset="0"/>
                 <a:ea typeface="Calibri" pitchFamily="34" charset="-122"/>
@@ -2051,7 +2051,7 @@
               </a:rPr>
               <a:t>10 / 10</a:t>
             </a:r>
-            <a:endParaRPr lang="en-US" sz="1100" dirty="0"/>
+            <a:endParaRPr lang="en-US" sz="1200" dirty="0"/>
           </a:p>
         </p:txBody>
       </p:sp>
@@ -2063,7 +2063,7 @@
         </p:nvSpPr>
         <p:spPr>
           <a:xfrm>
-            <a:off x="457200" y="365760"/>
+            <a:off x="640080" y="457200"/>
             <a:ext cx="10972800" cy="411480"/>
           </a:xfrm>
           <a:prstGeom prst="rect">
@@ -2082,7 +2082,7 @@
             <a:r>
               <a:rPr lang="en-US" sz="2800" dirty="0">
                 <a:solidFill>
-                  <a:srgbClr val="F4F1EA"/>
+                  <a:srgbClr val="1C1C1C"/>
                 </a:solidFill>
                 <a:latin typeface="Georgia" pitchFamily="34" charset="0"/>
                 <a:ea typeface="Georgia" pitchFamily="34" charset="-122"/>
@@ -2102,8 +2102,8 @@
         </p:nvSpPr>
         <p:spPr>
           <a:xfrm>
-            <a:off x="457200" y="1280160"/>
-            <a:ext cx="11155680" cy="2194560"/>
+            <a:off x="640080" y="1371600"/>
+            <a:ext cx="10972800" cy="2194560"/>
           </a:xfrm>
           <a:prstGeom prst="rect">
             <a:avLst/>
@@ -2121,7 +2121,7 @@
             <a:r>
               <a:rPr lang="en-US" sz="2400" dirty="0">
                 <a:solidFill>
-                  <a:srgbClr val="F4F1EA"/>
+                  <a:srgbClr val="1C1C1C"/>
                 </a:solidFill>
                 <a:latin typeface="Georgia" pitchFamily="34" charset="0"/>
                 <a:ea typeface="Georgia" pitchFamily="34" charset="-122"/>
@@ -2138,7 +2138,7 @@
             <a:r>
               <a:rPr lang="en-US" sz="2400" dirty="0">
                 <a:solidFill>
-                  <a:srgbClr val="F4F1EA"/>
+                  <a:srgbClr val="1C1C1C"/>
                 </a:solidFill>
                 <a:latin typeface="Georgia" pitchFamily="34" charset="0"/>
                 <a:ea typeface="Georgia" pitchFamily="34" charset="-122"/>
@@ -2155,13 +2155,13 @@
             <a:r>
               <a:rPr lang="en-US" sz="2400" dirty="0">
                 <a:solidFill>
-                  <a:srgbClr val="F4F1EA"/>
+                  <a:srgbClr val="1C1C1C"/>
                 </a:solidFill>
                 <a:latin typeface="Georgia" pitchFamily="34" charset="0"/>
                 <a:ea typeface="Georgia" pitchFamily="34" charset="-122"/>
                 <a:cs typeface="Georgia" pitchFamily="34" charset="-120"/>
               </a:rPr>
-              <a:t>Оставлять ответственность на человеке — обязательно, и это пишется в контур, не в подпись к видео.</a:t>
+              <a:t>Ответственность человека пишется в контур, не в подпись к видео.</a:t>
             </a:r>
             <a:endParaRPr lang="en-US" sz="2400" dirty="0"/>
           </a:p>
@@ -2175,34 +2175,68 @@
         </p:nvSpPr>
         <p:spPr>
           <a:xfrm>
-            <a:off x="457200" y="4846320"/>
-            <a:ext cx="11155680" cy="548640"/>
-          </a:xfrm>
-          <a:prstGeom prst="rect">
-            <a:avLst/>
-          </a:prstGeom>
-          <a:noFill/>
-          <a:ln/>
-        </p:spPr>
-        <p:txBody>
-          <a:bodyPr wrap="square" lIns="0" tIns="0" rIns="0" bIns="0" rtlCol="0" anchor="ctr"/>
-          <a:lstStyle/>
-          <a:p>
-            <a:pPr indent="0" marL="0">
-              <a:buNone/>
-            </a:pPr>
-            <a:r>
-              <a:rPr lang="en-US" sz="1400" dirty="0">
-                <a:solidFill>
-                  <a:srgbClr val="9AA3B2"/>
-                </a:solidFill>
-                <a:latin typeface="Calibri" pitchFamily="34" charset="0"/>
-                <a:ea typeface="Calibri" pitchFamily="34" charset="-122"/>
-                <a:cs typeface="Calibri" pitchFamily="34" charset="-120"/>
-              </a:rPr>
-              <a:t>Источники: t.me/yury/1300 · ria.ru/20261007/ii-2122870824.html · форум «Цифровые решения», 6–10 октября 2026.</a:t>
-            </a:r>
-            <a:endParaRPr lang="en-US" sz="1400" dirty="0"/>
+            <a:off x="640080" y="4023360"/>
+            <a:ext cx="10972800" cy="1097280"/>
+          </a:xfrm>
+          <a:prstGeom prst="rect">
+            <a:avLst/>
+          </a:prstGeom>
+          <a:noFill/>
+          <a:ln/>
+        </p:spPr>
+        <p:txBody>
+          <a:bodyPr wrap="square" lIns="0" tIns="0" rIns="0" bIns="0" rtlCol="0" anchor="ctr"/>
+          <a:lstStyle/>
+          <a:p>
+            <a:pPr indent="0" marL="0">
+              <a:buNone/>
+            </a:pPr>
+            <a:r>
+              <a:rPr lang="en-US" sz="1600" dirty="0">
+                <a:solidFill>
+                  <a:srgbClr val="5E6670"/>
+                </a:solidFill>
+                <a:latin typeface="Calibri" pitchFamily="34" charset="0"/>
+                <a:ea typeface="Calibri" pitchFamily="34" charset="-122"/>
+                <a:cs typeface="Calibri" pitchFamily="34" charset="-120"/>
+              </a:rPr>
+              <a:t>t.me/yury/1300</a:t>
+            </a:r>
+            <a:endParaRPr lang="en-US" sz="1600" dirty="0"/>
+          </a:p>
+          <a:p>
+            <a:pPr indent="0" marL="0">
+              <a:buNone/>
+            </a:pPr>
+            <a:r>
+              <a:rPr lang="en-US" sz="1600" dirty="0">
+                <a:solidFill>
+                  <a:srgbClr val="5E6670"/>
+                </a:solidFill>
+                <a:latin typeface="Calibri" pitchFamily="34" charset="0"/>
+                <a:ea typeface="Calibri" pitchFamily="34" charset="-122"/>
+                <a:cs typeface="Calibri" pitchFamily="34" charset="-120"/>
+              </a:rPr>
+              <a:t>ria.ru/20261007/ii-2122870824.html</a:t>
+            </a:r>
+            <a:endParaRPr lang="en-US" sz="1600" dirty="0"/>
+          </a:p>
+          <a:p>
+            <a:pPr indent="0" marL="0">
+              <a:buNone/>
+            </a:pPr>
+            <a:r>
+              <a:rPr lang="en-US" sz="1600" dirty="0">
+                <a:solidFill>
+                  <a:srgbClr val="5E6670"/>
+                </a:solidFill>
+                <a:latin typeface="Calibri" pitchFamily="34" charset="0"/>
+                <a:ea typeface="Calibri" pitchFamily="34" charset="-122"/>
+                <a:cs typeface="Calibri" pitchFamily="34" charset="-120"/>
+              </a:rPr>
+              <a:t>Форум «Цифровые решения», 6–10 октября 2026</a:t>
+            </a:r>
+            <a:endParaRPr lang="en-US" sz="1600" dirty="0"/>
           </a:p>
         </p:txBody>
       </p:sp>
@@ -2220,7 +2254,7 @@
     <p:bg>
       <p:bgPr>
         <a:solidFill>
-          <a:srgbClr val="12151C"/>
+          <a:srgbClr val="FFFFFF"/>
         </a:solidFill>
       </p:bgPr>
     </p:bg>
@@ -2246,14 +2280,14 @@
         </p:nvSpPr>
         <p:spPr>
           <a:xfrm>
-            <a:off x="0" y="0"/>
-            <a:ext cx="109728" cy="6858000"/>
+            <a:off x="502920" y="6446520"/>
+            <a:ext cx="11155680" cy="9144"/>
           </a:xfrm>
           <a:prstGeom prst="rect">
             <a:avLst/>
           </a:prstGeom>
           <a:solidFill>
-            <a:srgbClr val="E8C39E"/>
+            <a:srgbClr val="D9D4CC"/>
           </a:solidFill>
           <a:ln/>
         </p:spPr>
@@ -2266,34 +2300,34 @@
         </p:nvSpPr>
         <p:spPr>
           <a:xfrm>
-            <a:off x="411480" y="6510528"/>
-            <a:ext cx="7315200" cy="219456"/>
-          </a:xfrm>
-          <a:prstGeom prst="rect">
-            <a:avLst/>
-          </a:prstGeom>
-          <a:noFill/>
-          <a:ln/>
-        </p:spPr>
-        <p:txBody>
-          <a:bodyPr wrap="square" lIns="0" tIns="0" rIns="0" bIns="0" rtlCol="0" anchor="ctr"/>
-          <a:lstStyle/>
-          <a:p>
-            <a:pPr indent="0" marL="0">
-              <a:buNone/>
-            </a:pPr>
-            <a:r>
-              <a:rPr lang="en-US" sz="1100" dirty="0">
-                <a:solidFill>
-                  <a:srgbClr val="9AA3B2"/>
-                </a:solidFill>
-                <a:latin typeface="Calibri" pitchFamily="34" charset="0"/>
-                <a:ea typeface="Calibri" pitchFamily="34" charset="-122"/>
-                <a:cs typeface="Calibri" pitchFamily="34" charset="-120"/>
-              </a:rPr>
-              <a:t>t.me/yury/1300  ·  7 октября 2026</a:t>
-            </a:r>
-            <a:endParaRPr lang="en-US" sz="1100" dirty="0"/>
+            <a:off x="502920" y="6510528"/>
+            <a:ext cx="5486400" cy="219456"/>
+          </a:xfrm>
+          <a:prstGeom prst="rect">
+            <a:avLst/>
+          </a:prstGeom>
+          <a:noFill/>
+          <a:ln/>
+        </p:spPr>
+        <p:txBody>
+          <a:bodyPr wrap="square" lIns="0" tIns="0" rIns="0" bIns="0" rtlCol="0" anchor="ctr"/>
+          <a:lstStyle/>
+          <a:p>
+            <a:pPr indent="0" marL="0">
+              <a:buNone/>
+            </a:pPr>
+            <a:r>
+              <a:rPr lang="en-US" sz="1200" dirty="0">
+                <a:solidFill>
+                  <a:srgbClr val="5E6670"/>
+                </a:solidFill>
+                <a:latin typeface="Calibri" pitchFamily="34" charset="0"/>
+                <a:ea typeface="Calibri" pitchFamily="34" charset="-122"/>
+                <a:cs typeface="Calibri" pitchFamily="34" charset="-120"/>
+              </a:rPr>
+              <a:t>t.me/yury/1300</a:t>
+            </a:r>
+            <a:endParaRPr lang="en-US" sz="1200" dirty="0"/>
           </a:p>
         </p:txBody>
       </p:sp>
@@ -2305,8 +2339,8 @@
         </p:nvSpPr>
         <p:spPr>
           <a:xfrm>
-            <a:off x="10424160" y="6510528"/>
-            <a:ext cx="1280160" cy="219456"/>
+            <a:off x="9418320" y="6510528"/>
+            <a:ext cx="2240280" cy="219456"/>
           </a:xfrm>
           <a:prstGeom prst="rect">
             <a:avLst/>
@@ -2322,9 +2356,9 @@
               <a:buNone/>
             </a:pPr>
             <a:r>
-              <a:rPr lang="en-US" sz="1100" dirty="0">
-                <a:solidFill>
-                  <a:srgbClr val="9AA3B2"/>
+              <a:rPr lang="en-US" sz="1200" dirty="0">
+                <a:solidFill>
+                  <a:srgbClr val="5E6670"/>
                 </a:solidFill>
                 <a:latin typeface="Calibri" pitchFamily="34" charset="0"/>
                 <a:ea typeface="Calibri" pitchFamily="34" charset="-122"/>
@@ -2332,7 +2366,7 @@
               </a:rPr>
               <a:t>2 / 10</a:t>
             </a:r>
-            <a:endParaRPr lang="en-US" sz="1100" dirty="0"/>
+            <a:endParaRPr lang="en-US" sz="1200" dirty="0"/>
           </a:p>
         </p:txBody>
       </p:sp>
@@ -2344,8 +2378,8 @@
         </p:nvSpPr>
         <p:spPr>
           <a:xfrm>
-            <a:off x="457200" y="320040"/>
-            <a:ext cx="9144000" cy="384048"/>
+            <a:off x="640080" y="365760"/>
+            <a:ext cx="10058400" cy="411480"/>
           </a:xfrm>
           <a:prstGeom prst="rect">
             <a:avLst/>
@@ -2363,7 +2397,7 @@
             <a:r>
               <a:rPr lang="en-US" sz="2800" dirty="0">
                 <a:solidFill>
-                  <a:srgbClr val="F4F1EA"/>
+                  <a:srgbClr val="1C1C1C"/>
                 </a:solidFill>
                 <a:latin typeface="Georgia" pitchFamily="34" charset="0"/>
                 <a:ea typeface="Georgia" pitchFamily="34" charset="-122"/>
@@ -2383,16 +2417,16 @@
         </p:nvSpPr>
         <p:spPr>
           <a:xfrm>
-            <a:off x="457200" y="1051560"/>
-            <a:ext cx="11247120" cy="2286000"/>
+            <a:off x="640080" y="1097280"/>
+            <a:ext cx="10881360" cy="2148840"/>
           </a:xfrm>
           <a:prstGeom prst="roundRect">
             <a:avLst>
-              <a:gd name="adj" fmla="val 3200"/>
+              <a:gd name="adj" fmla="val 2553"/>
             </a:avLst>
           </a:prstGeom>
           <a:solidFill>
-            <a:srgbClr val="1C2430"/>
+            <a:srgbClr val="F6F4F0"/>
           </a:solidFill>
           <a:ln/>
         </p:spPr>
@@ -2405,8 +2439,8 @@
         </p:nvSpPr>
         <p:spPr>
           <a:xfrm>
-            <a:off x="731520" y="1280160"/>
-            <a:ext cx="10698480" cy="1828800"/>
+            <a:off x="868680" y="1298448"/>
+            <a:ext cx="10424160" cy="1737360"/>
           </a:xfrm>
           <a:prstGeom prst="rect">
             <a:avLst/>
@@ -2424,7 +2458,7 @@
             <a:r>
               <a:rPr lang="en-US" sz="2000" dirty="0">
                 <a:solidFill>
-                  <a:srgbClr val="F4F1EA"/>
+                  <a:srgbClr val="1C1C1C"/>
                 </a:solidFill>
                 <a:latin typeface="Georgia" pitchFamily="34" charset="0"/>
                 <a:ea typeface="Georgia" pitchFamily="34" charset="-122"/>
@@ -2444,8 +2478,64 @@
         </p:nvSpPr>
         <p:spPr>
           <a:xfrm>
-            <a:off x="457200" y="3611880"/>
-            <a:ext cx="11155680" cy="731520"/>
+            <a:off x="640080" y="3520440"/>
+            <a:ext cx="10881360" cy="777240"/>
+          </a:xfrm>
+          <a:prstGeom prst="rect">
+            <a:avLst/>
+          </a:prstGeom>
+          <a:noFill/>
+          <a:ln/>
+        </p:spPr>
+        <p:txBody>
+          <a:bodyPr wrap="square" lIns="0" tIns="0" rIns="0" bIns="0" rtlCol="0" anchor="ctr"/>
+          <a:lstStyle/>
+          <a:p>
+            <a:pPr indent="0" marL="0">
+              <a:buNone/>
+            </a:pPr>
+            <a:r>
+              <a:rPr lang="en-US" sz="1600" dirty="0">
+                <a:solidFill>
+                  <a:srgbClr val="5E6670"/>
+                </a:solidFill>
+                <a:latin typeface="Calibri" pitchFamily="34" charset="0"/>
+                <a:ea typeface="Calibri" pitchFamily="34" charset="-122"/>
+                <a:cs typeface="Calibri" pitchFamily="34" charset="-120"/>
+              </a:rPr>
+              <a:t>Подпись поста, дословно. Ролик 3:11 в превью недоступен: «Media is too big». Покадровой расшифровки нет.</a:t>
+            </a:r>
+            <a:endParaRPr lang="en-US" sz="1600" dirty="0"/>
+          </a:p>
+          <a:p>
+            <a:pPr indent="0" marL="0">
+              <a:buNone/>
+            </a:pPr>
+            <a:r>
+              <a:rPr lang="en-US" sz="1600" dirty="0">
+                <a:solidFill>
+                  <a:srgbClr val="5E6670"/>
+                </a:solidFill>
+                <a:latin typeface="Calibri" pitchFamily="34" charset="0"/>
+                <a:ea typeface="Calibri" pitchFamily="34" charset="-122"/>
+                <a:cs typeface="Calibri" pitchFamily="34" charset="-120"/>
+              </a:rPr>
+              <a:t>489 просмотров на момент снятия. Та же речь в тот же день процитирована РИА Новости.</a:t>
+            </a:r>
+            <a:endParaRPr lang="en-US" sz="1600" dirty="0"/>
+          </a:p>
+        </p:txBody>
+      </p:sp>
+      <p:sp>
+        <p:nvSpPr>
+          <p:cNvPr id="9" name="Text 7"/>
+          <p:cNvSpPr/>
+          <p:nvPr/>
+        </p:nvSpPr>
+        <p:spPr>
+          <a:xfrm>
+            <a:off x="640080" y="4434840"/>
+            <a:ext cx="10881360" cy="320040"/>
           </a:xfrm>
           <a:prstGeom prst="rect">
             <a:avLst/>
@@ -2463,69 +2553,13 @@
             <a:r>
               <a:rPr lang="en-US" sz="1500" dirty="0">
                 <a:solidFill>
-                  <a:srgbClr val="9AA3B2"/>
-                </a:solidFill>
-                <a:latin typeface="Calibri" pitchFamily="34" charset="0"/>
-                <a:ea typeface="Calibri" pitchFamily="34" charset="-122"/>
-                <a:cs typeface="Calibri" pitchFamily="34" charset="-120"/>
-              </a:rPr>
-              <a:t>Подпись поста, дословно. Ролик 3:11 в превью помечен «Media is too big»: покадровой расшифровки нет.</a:t>
-            </a:r>
-            <a:endParaRPr lang="en-US" sz="1500" dirty="0"/>
-          </a:p>
-          <a:p>
-            <a:pPr indent="0" marL="0">
-              <a:buNone/>
-            </a:pPr>
-            <a:r>
-              <a:rPr lang="en-US" sz="1500" dirty="0">
-                <a:solidFill>
-                  <a:srgbClr val="9AA3B2"/>
-                </a:solidFill>
-                <a:latin typeface="Calibri" pitchFamily="34" charset="0"/>
-                <a:ea typeface="Calibri" pitchFamily="34" charset="-122"/>
-                <a:cs typeface="Calibri" pitchFamily="34" charset="-120"/>
-              </a:rPr>
-              <a:t>489 просмотров, реакции 16 / 10 / 7 на момент снятия. Канал @yury.</a:t>
-            </a:r>
-            <a:endParaRPr lang="en-US" sz="1500" dirty="0"/>
-          </a:p>
-        </p:txBody>
-      </p:sp>
-      <p:sp>
-        <p:nvSpPr>
-          <p:cNvPr id="9" name="Text 7"/>
-          <p:cNvSpPr/>
-          <p:nvPr/>
-        </p:nvSpPr>
-        <p:spPr>
-          <a:xfrm>
-            <a:off x="457200" y="4480560"/>
-            <a:ext cx="11155680" cy="640080"/>
-          </a:xfrm>
-          <a:prstGeom prst="rect">
-            <a:avLst/>
-          </a:prstGeom>
-          <a:noFill/>
-          <a:ln/>
-        </p:spPr>
-        <p:txBody>
-          <a:bodyPr wrap="square" lIns="0" tIns="0" rIns="0" bIns="0" rtlCol="0" anchor="ctr"/>
-          <a:lstStyle/>
-          <a:p>
-            <a:pPr indent="0" marL="0">
-              <a:buNone/>
-            </a:pPr>
-            <a:r>
-              <a:rPr lang="en-US" sz="1500" dirty="0">
-                <a:solidFill>
-                  <a:srgbClr val="8EB6D9"/>
-                </a:solidFill>
-                <a:latin typeface="Calibri" pitchFamily="34" charset="0"/>
-                <a:ea typeface="Calibri" pitchFamily="34" charset="-122"/>
-                <a:cs typeface="Calibri" pitchFamily="34" charset="-120"/>
-              </a:rPr>
-              <a:t>Та же позиция в тот же день процитирована РИА Новости по пленарной сессии. Подпись — сжатие речи автором.</a:t>
+                  <a:srgbClr val="1F4B6E"/>
+                </a:solidFill>
+                <a:latin typeface="Calibri" pitchFamily="34" charset="0"/>
+                <a:ea typeface="Calibri" pitchFamily="34" charset="-122"/>
+                <a:cs typeface="Calibri" pitchFamily="34" charset="-120"/>
+              </a:rPr>
+              <a:t>Источник сессии: ria.ru/20261007/ii-2122870824.html</a:t>
             </a:r>
             <a:endParaRPr lang="en-US" sz="1500" dirty="0"/>
           </a:p>
@@ -2545,7 +2579,7 @@
     <p:bg>
       <p:bgPr>
         <a:solidFill>
-          <a:srgbClr val="12151C"/>
+          <a:srgbClr val="FFFFFF"/>
         </a:solidFill>
       </p:bgPr>
     </p:bg>
@@ -2571,14 +2605,14 @@
         </p:nvSpPr>
         <p:spPr>
           <a:xfrm>
-            <a:off x="0" y="0"/>
-            <a:ext cx="109728" cy="6858000"/>
+            <a:off x="502920" y="6446520"/>
+            <a:ext cx="11155680" cy="9144"/>
           </a:xfrm>
           <a:prstGeom prst="rect">
             <a:avLst/>
           </a:prstGeom>
           <a:solidFill>
-            <a:srgbClr val="E8C39E"/>
+            <a:srgbClr val="D9D4CC"/>
           </a:solidFill>
           <a:ln/>
         </p:spPr>
@@ -2591,34 +2625,34 @@
         </p:nvSpPr>
         <p:spPr>
           <a:xfrm>
-            <a:off x="411480" y="6510528"/>
-            <a:ext cx="7315200" cy="219456"/>
-          </a:xfrm>
-          <a:prstGeom prst="rect">
-            <a:avLst/>
-          </a:prstGeom>
-          <a:noFill/>
-          <a:ln/>
-        </p:spPr>
-        <p:txBody>
-          <a:bodyPr wrap="square" lIns="0" tIns="0" rIns="0" bIns="0" rtlCol="0" anchor="ctr"/>
-          <a:lstStyle/>
-          <a:p>
-            <a:pPr indent="0" marL="0">
-              <a:buNone/>
-            </a:pPr>
-            <a:r>
-              <a:rPr lang="en-US" sz="1100" dirty="0">
-                <a:solidFill>
-                  <a:srgbClr val="9AA3B2"/>
-                </a:solidFill>
-                <a:latin typeface="Calibri" pitchFamily="34" charset="0"/>
-                <a:ea typeface="Calibri" pitchFamily="34" charset="-122"/>
-                <a:cs typeface="Calibri" pitchFamily="34" charset="-120"/>
-              </a:rPr>
-              <a:t>t.me/yury/1300  ·  7 октября 2026</a:t>
-            </a:r>
-            <a:endParaRPr lang="en-US" sz="1100" dirty="0"/>
+            <a:off x="502920" y="6510528"/>
+            <a:ext cx="5486400" cy="219456"/>
+          </a:xfrm>
+          <a:prstGeom prst="rect">
+            <a:avLst/>
+          </a:prstGeom>
+          <a:noFill/>
+          <a:ln/>
+        </p:spPr>
+        <p:txBody>
+          <a:bodyPr wrap="square" lIns="0" tIns="0" rIns="0" bIns="0" rtlCol="0" anchor="ctr"/>
+          <a:lstStyle/>
+          <a:p>
+            <a:pPr indent="0" marL="0">
+              <a:buNone/>
+            </a:pPr>
+            <a:r>
+              <a:rPr lang="en-US" sz="1200" dirty="0">
+                <a:solidFill>
+                  <a:srgbClr val="5E6670"/>
+                </a:solidFill>
+                <a:latin typeface="Calibri" pitchFamily="34" charset="0"/>
+                <a:ea typeface="Calibri" pitchFamily="34" charset="-122"/>
+                <a:cs typeface="Calibri" pitchFamily="34" charset="-120"/>
+              </a:rPr>
+              <a:t>t.me/yury/1300</a:t>
+            </a:r>
+            <a:endParaRPr lang="en-US" sz="1200" dirty="0"/>
           </a:p>
         </p:txBody>
       </p:sp>
@@ -2630,8 +2664,8 @@
         </p:nvSpPr>
         <p:spPr>
           <a:xfrm>
-            <a:off x="10424160" y="6510528"/>
-            <a:ext cx="1280160" cy="219456"/>
+            <a:off x="9418320" y="6510528"/>
+            <a:ext cx="2240280" cy="219456"/>
           </a:xfrm>
           <a:prstGeom prst="rect">
             <a:avLst/>
@@ -2647,9 +2681,9 @@
               <a:buNone/>
             </a:pPr>
             <a:r>
-              <a:rPr lang="en-US" sz="1100" dirty="0">
-                <a:solidFill>
-                  <a:srgbClr val="9AA3B2"/>
+              <a:rPr lang="en-US" sz="1200" dirty="0">
+                <a:solidFill>
+                  <a:srgbClr val="5E6670"/>
                 </a:solidFill>
                 <a:latin typeface="Calibri" pitchFamily="34" charset="0"/>
                 <a:ea typeface="Calibri" pitchFamily="34" charset="-122"/>
@@ -2657,7 +2691,7 @@
               </a:rPr>
               <a:t>3 / 10</a:t>
             </a:r>
-            <a:endParaRPr lang="en-US" sz="1100" dirty="0"/>
+            <a:endParaRPr lang="en-US" sz="1200" dirty="0"/>
           </a:p>
         </p:txBody>
       </p:sp>
@@ -2669,8 +2703,8 @@
         </p:nvSpPr>
         <p:spPr>
           <a:xfrm>
-            <a:off x="457200" y="292608"/>
-            <a:ext cx="10972800" cy="384048"/>
+            <a:off x="640080" y="347472"/>
+            <a:ext cx="10972800" cy="411480"/>
           </a:xfrm>
           <a:prstGeom prst="rect">
             <a:avLst/>
@@ -2688,7 +2722,7 @@
             <a:r>
               <a:rPr lang="en-US" sz="2800" dirty="0">
                 <a:solidFill>
-                  <a:srgbClr val="F4F1EA"/>
+                  <a:srgbClr val="1C1C1C"/>
                 </a:solidFill>
                 <a:latin typeface="Georgia" pitchFamily="34" charset="0"/>
                 <a:ea typeface="Georgia" pitchFamily="34" charset="-122"/>
@@ -2708,8 +2742,8 @@
         </p:nvSpPr>
         <p:spPr>
           <a:xfrm>
-            <a:off x="457200" y="960120"/>
-            <a:ext cx="731520" cy="365760"/>
+            <a:off x="640080" y="1051560"/>
+            <a:ext cx="411480" cy="329184"/>
           </a:xfrm>
           <a:prstGeom prst="rect">
             <a:avLst/>
@@ -2727,13 +2761,13 @@
             <a:r>
               <a:rPr lang="en-US" sz="1800" dirty="0">
                 <a:solidFill>
-                  <a:srgbClr val="E8C39E"/>
-                </a:solidFill>
-                <a:latin typeface="Calibri" pitchFamily="34" charset="0"/>
-                <a:ea typeface="Calibri" pitchFamily="34" charset="-122"/>
-                <a:cs typeface="Calibri" pitchFamily="34" charset="-120"/>
-              </a:rPr>
-              <a:t>01</a:t>
+                  <a:srgbClr val="1F4B6E"/>
+                </a:solidFill>
+                <a:latin typeface="Calibri" pitchFamily="34" charset="0"/>
+                <a:ea typeface="Calibri" pitchFamily="34" charset="-122"/>
+                <a:cs typeface="Calibri" pitchFamily="34" charset="-120"/>
+              </a:rPr>
+              <a:t>1</a:t>
             </a:r>
             <a:endParaRPr lang="en-US" sz="1800" dirty="0"/>
           </a:p>
@@ -2747,8 +2781,8 @@
         </p:nvSpPr>
         <p:spPr>
           <a:xfrm>
-            <a:off x="1325880" y="960120"/>
-            <a:ext cx="9601200" cy="329184"/>
+            <a:off x="1188720" y="1051560"/>
+            <a:ext cx="10058400" cy="329184"/>
           </a:xfrm>
           <a:prstGeom prst="rect">
             <a:avLst/>
@@ -2766,7 +2800,7 @@
             <a:r>
               <a:rPr lang="en-US" sz="1800" dirty="0">
                 <a:solidFill>
-                  <a:srgbClr val="F4F1EA"/>
+                  <a:srgbClr val="1C1C1C"/>
                 </a:solidFill>
                 <a:latin typeface="Calibri" pitchFamily="34" charset="0"/>
                 <a:ea typeface="Calibri" pitchFamily="34" charset="-122"/>
@@ -2786,26 +2820,26 @@
         </p:nvSpPr>
         <p:spPr>
           <a:xfrm>
-            <a:off x="1325880" y="1325880"/>
-            <a:ext cx="9875520" cy="640080"/>
-          </a:xfrm>
-          <a:prstGeom prst="rect">
-            <a:avLst/>
-          </a:prstGeom>
-          <a:noFill/>
-          <a:ln/>
-        </p:spPr>
-        <p:txBody>
-          <a:bodyPr wrap="square" lIns="0" tIns="0" rIns="0" bIns="0" rtlCol="0" anchor="ctr"/>
-          <a:lstStyle/>
-          <a:p>
-            <a:pPr indent="0" marL="0">
-              <a:buNone/>
-            </a:pPr>
-            <a:r>
-              <a:rPr lang="en-US" sz="1500" dirty="0">
-                <a:solidFill>
-                  <a:srgbClr val="9AA3B2"/>
+            <a:off x="1188720" y="1417320"/>
+            <a:ext cx="10058400" cy="548640"/>
+          </a:xfrm>
+          <a:prstGeom prst="rect">
+            <a:avLst/>
+          </a:prstGeom>
+          <a:noFill/>
+          <a:ln/>
+        </p:spPr>
+        <p:txBody>
+          <a:bodyPr wrap="square" lIns="0" tIns="0" rIns="0" bIns="0" rtlCol="0" anchor="ctr"/>
+          <a:lstStyle/>
+          <a:p>
+            <a:pPr indent="0" marL="0">
+              <a:buNone/>
+            </a:pPr>
+            <a:r>
+              <a:rPr lang="en-US" sz="1600" dirty="0">
+                <a:solidFill>
+                  <a:srgbClr val="5E6670"/>
                 </a:solidFill>
                 <a:latin typeface="Calibri" pitchFamily="34" charset="0"/>
                 <a:ea typeface="Calibri" pitchFamily="34" charset="-122"/>
@@ -2813,7 +2847,7 @@
               </a:rPr>
               <a:t>Агенту нельзя сказать «не делай это и это»: он не человек, начинает тупить и не делает работу.</a:t>
             </a:r>
-            <a:endParaRPr lang="en-US" sz="1500" dirty="0"/>
+            <a:endParaRPr lang="en-US" sz="1600" dirty="0"/>
           </a:p>
         </p:txBody>
       </p:sp>
@@ -2825,8 +2859,8 @@
         </p:nvSpPr>
         <p:spPr>
           <a:xfrm>
-            <a:off x="457200" y="2240280"/>
-            <a:ext cx="731520" cy="365760"/>
+            <a:off x="640080" y="2286000"/>
+            <a:ext cx="411480" cy="329184"/>
           </a:xfrm>
           <a:prstGeom prst="rect">
             <a:avLst/>
@@ -2844,13 +2878,13 @@
             <a:r>
               <a:rPr lang="en-US" sz="1800" dirty="0">
                 <a:solidFill>
-                  <a:srgbClr val="E8C39E"/>
-                </a:solidFill>
-                <a:latin typeface="Calibri" pitchFamily="34" charset="0"/>
-                <a:ea typeface="Calibri" pitchFamily="34" charset="-122"/>
-                <a:cs typeface="Calibri" pitchFamily="34" charset="-120"/>
-              </a:rPr>
-              <a:t>02</a:t>
+                  <a:srgbClr val="1F4B6E"/>
+                </a:solidFill>
+                <a:latin typeface="Calibri" pitchFamily="34" charset="0"/>
+                <a:ea typeface="Calibri" pitchFamily="34" charset="-122"/>
+                <a:cs typeface="Calibri" pitchFamily="34" charset="-120"/>
+              </a:rPr>
+              <a:t>2</a:t>
             </a:r>
             <a:endParaRPr lang="en-US" sz="1800" dirty="0"/>
           </a:p>
@@ -2864,8 +2898,8 @@
         </p:nvSpPr>
         <p:spPr>
           <a:xfrm>
-            <a:off x="1325880" y="2240280"/>
-            <a:ext cx="9601200" cy="329184"/>
+            <a:off x="1188720" y="2286000"/>
+            <a:ext cx="10058400" cy="329184"/>
           </a:xfrm>
           <a:prstGeom prst="rect">
             <a:avLst/>
@@ -2883,7 +2917,7 @@
             <a:r>
               <a:rPr lang="en-US" sz="1800" dirty="0">
                 <a:solidFill>
-                  <a:srgbClr val="F4F1EA"/>
+                  <a:srgbClr val="1C1C1C"/>
                 </a:solidFill>
                 <a:latin typeface="Calibri" pitchFamily="34" charset="0"/>
                 <a:ea typeface="Calibri" pitchFamily="34" charset="-122"/>
@@ -2903,26 +2937,26 @@
         </p:nvSpPr>
         <p:spPr>
           <a:xfrm>
-            <a:off x="1325880" y="2606040"/>
-            <a:ext cx="9875520" cy="640080"/>
-          </a:xfrm>
-          <a:prstGeom prst="rect">
-            <a:avLst/>
-          </a:prstGeom>
-          <a:noFill/>
-          <a:ln/>
-        </p:spPr>
-        <p:txBody>
-          <a:bodyPr wrap="square" lIns="0" tIns="0" rIns="0" bIns="0" rtlCol="0" anchor="ctr"/>
-          <a:lstStyle/>
-          <a:p>
-            <a:pPr indent="0" marL="0">
-              <a:buNone/>
-            </a:pPr>
-            <a:r>
-              <a:rPr lang="en-US" sz="1500" dirty="0">
-                <a:solidFill>
-                  <a:srgbClr val="9AA3B2"/>
+            <a:off x="1188720" y="2651760"/>
+            <a:ext cx="10058400" cy="548640"/>
+          </a:xfrm>
+          <a:prstGeom prst="rect">
+            <a:avLst/>
+          </a:prstGeom>
+          <a:noFill/>
+          <a:ln/>
+        </p:spPr>
+        <p:txBody>
+          <a:bodyPr wrap="square" lIns="0" tIns="0" rIns="0" bIns="0" rtlCol="0" anchor="ctr"/>
+          <a:lstStyle/>
+          <a:p>
+            <a:pPr indent="0" marL="0">
+              <a:buNone/>
+            </a:pPr>
+            <a:r>
+              <a:rPr lang="en-US" sz="1600" dirty="0">
+                <a:solidFill>
+                  <a:srgbClr val="5E6670"/>
                 </a:solidFill>
                 <a:latin typeface="Calibri" pitchFamily="34" charset="0"/>
                 <a:ea typeface="Calibri" pitchFamily="34" charset="-122"/>
@@ -2930,7 +2964,7 @@
               </a:rPr>
               <a:t>Делать соразмерное заданию и не выходить за разумные границы.</a:t>
             </a:r>
-            <a:endParaRPr lang="en-US" sz="1500" dirty="0"/>
+            <a:endParaRPr lang="en-US" sz="1600" dirty="0"/>
           </a:p>
         </p:txBody>
       </p:sp>
@@ -2942,8 +2976,8 @@
         </p:nvSpPr>
         <p:spPr>
           <a:xfrm>
-            <a:off x="457200" y="3520440"/>
-            <a:ext cx="731520" cy="365760"/>
+            <a:off x="640080" y="3520440"/>
+            <a:ext cx="411480" cy="329184"/>
           </a:xfrm>
           <a:prstGeom prst="rect">
             <a:avLst/>
@@ -2961,13 +2995,13 @@
             <a:r>
               <a:rPr lang="en-US" sz="1800" dirty="0">
                 <a:solidFill>
-                  <a:srgbClr val="E8C39E"/>
-                </a:solidFill>
-                <a:latin typeface="Calibri" pitchFamily="34" charset="0"/>
-                <a:ea typeface="Calibri" pitchFamily="34" charset="-122"/>
-                <a:cs typeface="Calibri" pitchFamily="34" charset="-120"/>
-              </a:rPr>
-              <a:t>03</a:t>
+                  <a:srgbClr val="1F4B6E"/>
+                </a:solidFill>
+                <a:latin typeface="Calibri" pitchFamily="34" charset="0"/>
+                <a:ea typeface="Calibri" pitchFamily="34" charset="-122"/>
+                <a:cs typeface="Calibri" pitchFamily="34" charset="-120"/>
+              </a:rPr>
+              <a:t>3</a:t>
             </a:r>
             <a:endParaRPr lang="en-US" sz="1800" dirty="0"/>
           </a:p>
@@ -2981,8 +3015,8 @@
         </p:nvSpPr>
         <p:spPr>
           <a:xfrm>
-            <a:off x="1325880" y="3520440"/>
-            <a:ext cx="9601200" cy="329184"/>
+            <a:off x="1188720" y="3520440"/>
+            <a:ext cx="10058400" cy="329184"/>
           </a:xfrm>
           <a:prstGeom prst="rect">
             <a:avLst/>
@@ -3000,7 +3034,7 @@
             <a:r>
               <a:rPr lang="en-US" sz="1800" dirty="0">
                 <a:solidFill>
-                  <a:srgbClr val="F4F1EA"/>
+                  <a:srgbClr val="1C1C1C"/>
                 </a:solidFill>
                 <a:latin typeface="Calibri" pitchFamily="34" charset="0"/>
                 <a:ea typeface="Calibri" pitchFamily="34" charset="-122"/>
@@ -3020,34 +3054,34 @@
         </p:nvSpPr>
         <p:spPr>
           <a:xfrm>
-            <a:off x="1325880" y="3886200"/>
-            <a:ext cx="9875520" cy="640080"/>
-          </a:xfrm>
-          <a:prstGeom prst="rect">
-            <a:avLst/>
-          </a:prstGeom>
-          <a:noFill/>
-          <a:ln/>
-        </p:spPr>
-        <p:txBody>
-          <a:bodyPr wrap="square" lIns="0" tIns="0" rIns="0" bIns="0" rtlCol="0" anchor="ctr"/>
-          <a:lstStyle/>
-          <a:p>
-            <a:pPr indent="0" marL="0">
-              <a:buNone/>
-            </a:pPr>
-            <a:r>
-              <a:rPr lang="en-US" sz="1500" dirty="0">
-                <a:solidFill>
-                  <a:srgbClr val="9AA3B2"/>
-                </a:solidFill>
-                <a:latin typeface="Calibri" pitchFamily="34" charset="0"/>
-                <a:ea typeface="Calibri" pitchFamily="34" charset="-122"/>
-                <a:cs typeface="Calibri" pitchFamily="34" charset="-120"/>
-              </a:rPr>
-              <a:t>Человек не разберёт все действия. Контур: банк, атака, детектор. Наверху человек.</a:t>
-            </a:r>
-            <a:endParaRPr lang="en-US" sz="1500" dirty="0"/>
+            <a:off x="1188720" y="3886200"/>
+            <a:ext cx="10058400" cy="548640"/>
+          </a:xfrm>
+          <a:prstGeom prst="rect">
+            <a:avLst/>
+          </a:prstGeom>
+          <a:noFill/>
+          <a:ln/>
+        </p:spPr>
+        <p:txBody>
+          <a:bodyPr wrap="square" lIns="0" tIns="0" rIns="0" bIns="0" rtlCol="0" anchor="ctr"/>
+          <a:lstStyle/>
+          <a:p>
+            <a:pPr indent="0" marL="0">
+              <a:buNone/>
+            </a:pPr>
+            <a:r>
+              <a:rPr lang="en-US" sz="1600" dirty="0">
+                <a:solidFill>
+                  <a:srgbClr val="5E6670"/>
+                </a:solidFill>
+                <a:latin typeface="Calibri" pitchFamily="34" charset="0"/>
+                <a:ea typeface="Calibri" pitchFamily="34" charset="-122"/>
+                <a:cs typeface="Calibri" pitchFamily="34" charset="-120"/>
+              </a:rPr>
+              <a:t>Человек не разберёт все действия. Контур: учебный банк, атака, детектор. Наверху человек.</a:t>
+            </a:r>
+            <a:endParaRPr lang="en-US" sz="1600" dirty="0"/>
           </a:p>
         </p:txBody>
       </p:sp>
@@ -3059,8 +3093,8 @@
         </p:nvSpPr>
         <p:spPr>
           <a:xfrm>
-            <a:off x="457200" y="4800600"/>
-            <a:ext cx="731520" cy="365760"/>
+            <a:off x="640080" y="4754880"/>
+            <a:ext cx="411480" cy="329184"/>
           </a:xfrm>
           <a:prstGeom prst="rect">
             <a:avLst/>
@@ -3078,13 +3112,13 @@
             <a:r>
               <a:rPr lang="en-US" sz="1800" dirty="0">
                 <a:solidFill>
-                  <a:srgbClr val="E8C39E"/>
-                </a:solidFill>
-                <a:latin typeface="Calibri" pitchFamily="34" charset="0"/>
-                <a:ea typeface="Calibri" pitchFamily="34" charset="-122"/>
-                <a:cs typeface="Calibri" pitchFamily="34" charset="-120"/>
-              </a:rPr>
-              <a:t>04</a:t>
+                  <a:srgbClr val="1F4B6E"/>
+                </a:solidFill>
+                <a:latin typeface="Calibri" pitchFamily="34" charset="0"/>
+                <a:ea typeface="Calibri" pitchFamily="34" charset="-122"/>
+                <a:cs typeface="Calibri" pitchFamily="34" charset="-120"/>
+              </a:rPr>
+              <a:t>4</a:t>
             </a:r>
             <a:endParaRPr lang="en-US" sz="1800" dirty="0"/>
           </a:p>
@@ -3098,8 +3132,8 @@
         </p:nvSpPr>
         <p:spPr>
           <a:xfrm>
-            <a:off x="1325880" y="4800600"/>
-            <a:ext cx="9601200" cy="329184"/>
+            <a:off x="1188720" y="4754880"/>
+            <a:ext cx="10058400" cy="329184"/>
           </a:xfrm>
           <a:prstGeom prst="rect">
             <a:avLst/>
@@ -3117,7 +3151,7 @@
             <a:r>
               <a:rPr lang="en-US" sz="1800" dirty="0">
                 <a:solidFill>
-                  <a:srgbClr val="F4F1EA"/>
+                  <a:srgbClr val="1C1C1C"/>
                 </a:solidFill>
                 <a:latin typeface="Calibri" pitchFamily="34" charset="0"/>
                 <a:ea typeface="Calibri" pitchFamily="34" charset="-122"/>
@@ -3137,26 +3171,26 @@
         </p:nvSpPr>
         <p:spPr>
           <a:xfrm>
-            <a:off x="1325880" y="5166360"/>
-            <a:ext cx="9875520" cy="640080"/>
-          </a:xfrm>
-          <a:prstGeom prst="rect">
-            <a:avLst/>
-          </a:prstGeom>
-          <a:noFill/>
-          <a:ln/>
-        </p:spPr>
-        <p:txBody>
-          <a:bodyPr wrap="square" lIns="0" tIns="0" rIns="0" bIns="0" rtlCol="0" anchor="ctr"/>
-          <a:lstStyle/>
-          <a:p>
-            <a:pPr indent="0" marL="0">
-              <a:buNone/>
-            </a:pPr>
-            <a:r>
-              <a:rPr lang="en-US" sz="1500" dirty="0">
-                <a:solidFill>
-                  <a:srgbClr val="9AA3B2"/>
+            <a:off x="1188720" y="5120640"/>
+            <a:ext cx="10058400" cy="548640"/>
+          </a:xfrm>
+          <a:prstGeom prst="rect">
+            <a:avLst/>
+          </a:prstGeom>
+          <a:noFill/>
+          <a:ln/>
+        </p:spPr>
+        <p:txBody>
+          <a:bodyPr wrap="square" lIns="0" tIns="0" rIns="0" bIns="0" rtlCol="0" anchor="ctr"/>
+          <a:lstStyle/>
+          <a:p>
+            <a:pPr indent="0" marL="0">
+              <a:buNone/>
+            </a:pPr>
+            <a:r>
+              <a:rPr lang="en-US" sz="1600" dirty="0">
+                <a:solidFill>
+                  <a:srgbClr val="5E6670"/>
                 </a:solidFill>
                 <a:latin typeface="Calibri" pitchFamily="34" charset="0"/>
                 <a:ea typeface="Calibri" pitchFamily="34" charset="-122"/>
@@ -3164,7 +3198,7 @@
               </a:rPr>
               <a:t>Если агент ошибся, оператор не должен говорить «это ИИ». Ни государству, ни бизнесу.</a:t>
             </a:r>
-            <a:endParaRPr lang="en-US" sz="1500" dirty="0"/>
+            <a:endParaRPr lang="en-US" sz="1600" dirty="0"/>
           </a:p>
         </p:txBody>
       </p:sp>
@@ -3182,7 +3216,7 @@
     <p:bg>
       <p:bgPr>
         <a:solidFill>
-          <a:srgbClr val="12151C"/>
+          <a:srgbClr val="FFFFFF"/>
         </a:solidFill>
       </p:bgPr>
     </p:bg>
@@ -3208,14 +3242,14 @@
         </p:nvSpPr>
         <p:spPr>
           <a:xfrm>
-            <a:off x="0" y="0"/>
-            <a:ext cx="109728" cy="6858000"/>
+            <a:off x="502920" y="6446520"/>
+            <a:ext cx="11155680" cy="9144"/>
           </a:xfrm>
           <a:prstGeom prst="rect">
             <a:avLst/>
           </a:prstGeom>
           <a:solidFill>
-            <a:srgbClr val="E8C39E"/>
+            <a:srgbClr val="D9D4CC"/>
           </a:solidFill>
           <a:ln/>
         </p:spPr>
@@ -3228,34 +3262,34 @@
         </p:nvSpPr>
         <p:spPr>
           <a:xfrm>
-            <a:off x="411480" y="6510528"/>
-            <a:ext cx="7315200" cy="219456"/>
-          </a:xfrm>
-          <a:prstGeom prst="rect">
-            <a:avLst/>
-          </a:prstGeom>
-          <a:noFill/>
-          <a:ln/>
-        </p:spPr>
-        <p:txBody>
-          <a:bodyPr wrap="square" lIns="0" tIns="0" rIns="0" bIns="0" rtlCol="0" anchor="ctr"/>
-          <a:lstStyle/>
-          <a:p>
-            <a:pPr indent="0" marL="0">
-              <a:buNone/>
-            </a:pPr>
-            <a:r>
-              <a:rPr lang="en-US" sz="1100" dirty="0">
-                <a:solidFill>
-                  <a:srgbClr val="9AA3B2"/>
-                </a:solidFill>
-                <a:latin typeface="Calibri" pitchFamily="34" charset="0"/>
-                <a:ea typeface="Calibri" pitchFamily="34" charset="-122"/>
-                <a:cs typeface="Calibri" pitchFamily="34" charset="-120"/>
-              </a:rPr>
-              <a:t>t.me/yury/1300  ·  7 октября 2026</a:t>
-            </a:r>
-            <a:endParaRPr lang="en-US" sz="1100" dirty="0"/>
+            <a:off x="502920" y="6510528"/>
+            <a:ext cx="5486400" cy="219456"/>
+          </a:xfrm>
+          <a:prstGeom prst="rect">
+            <a:avLst/>
+          </a:prstGeom>
+          <a:noFill/>
+          <a:ln/>
+        </p:spPr>
+        <p:txBody>
+          <a:bodyPr wrap="square" lIns="0" tIns="0" rIns="0" bIns="0" rtlCol="0" anchor="ctr"/>
+          <a:lstStyle/>
+          <a:p>
+            <a:pPr indent="0" marL="0">
+              <a:buNone/>
+            </a:pPr>
+            <a:r>
+              <a:rPr lang="en-US" sz="1200" dirty="0">
+                <a:solidFill>
+                  <a:srgbClr val="5E6670"/>
+                </a:solidFill>
+                <a:latin typeface="Calibri" pitchFamily="34" charset="0"/>
+                <a:ea typeface="Calibri" pitchFamily="34" charset="-122"/>
+                <a:cs typeface="Calibri" pitchFamily="34" charset="-120"/>
+              </a:rPr>
+              <a:t>t.me/yury/1300</a:t>
+            </a:r>
+            <a:endParaRPr lang="en-US" sz="1200" dirty="0"/>
           </a:p>
         </p:txBody>
       </p:sp>
@@ -3267,8 +3301,8 @@
         </p:nvSpPr>
         <p:spPr>
           <a:xfrm>
-            <a:off x="10424160" y="6510528"/>
-            <a:ext cx="1280160" cy="219456"/>
+            <a:off x="9418320" y="6510528"/>
+            <a:ext cx="2240280" cy="219456"/>
           </a:xfrm>
           <a:prstGeom prst="rect">
             <a:avLst/>
@@ -3284,9 +3318,9 @@
               <a:buNone/>
             </a:pPr>
             <a:r>
-              <a:rPr lang="en-US" sz="1100" dirty="0">
-                <a:solidFill>
-                  <a:srgbClr val="9AA3B2"/>
+              <a:rPr lang="en-US" sz="1200" dirty="0">
+                <a:solidFill>
+                  <a:srgbClr val="5E6670"/>
                 </a:solidFill>
                 <a:latin typeface="Calibri" pitchFamily="34" charset="0"/>
                 <a:ea typeface="Calibri" pitchFamily="34" charset="-122"/>
@@ -3294,7 +3328,7 @@
               </a:rPr>
               <a:t>4 / 10</a:t>
             </a:r>
-            <a:endParaRPr lang="en-US" sz="1100" dirty="0"/>
+            <a:endParaRPr lang="en-US" sz="1200" dirty="0"/>
           </a:p>
         </p:txBody>
       </p:sp>
@@ -3306,8 +3340,8 @@
         </p:nvSpPr>
         <p:spPr>
           <a:xfrm>
-            <a:off x="457200" y="292608"/>
-            <a:ext cx="10972800" cy="384048"/>
+            <a:off x="640080" y="347472"/>
+            <a:ext cx="10972800" cy="411480"/>
           </a:xfrm>
           <a:prstGeom prst="rect">
             <a:avLst/>
@@ -3325,7 +3359,7 @@
             <a:r>
               <a:rPr lang="en-US" sz="2800" dirty="0">
                 <a:solidFill>
-                  <a:srgbClr val="F4F1EA"/>
+                  <a:srgbClr val="1C1C1C"/>
                 </a:solidFill>
                 <a:latin typeface="Georgia" pitchFamily="34" charset="0"/>
                 <a:ea typeface="Georgia" pitchFamily="34" charset="-122"/>
@@ -3345,16 +3379,16 @@
         </p:nvSpPr>
         <p:spPr>
           <a:xfrm>
-            <a:off x="411480" y="1188720"/>
-            <a:ext cx="3611880" cy="4206240"/>
+            <a:off x="640080" y="1143000"/>
+            <a:ext cx="3520440" cy="4434840"/>
           </a:xfrm>
           <a:prstGeom prst="roundRect">
             <a:avLst>
-              <a:gd name="adj" fmla="val 2025"/>
+              <a:gd name="adj" fmla="val 1558"/>
             </a:avLst>
           </a:prstGeom>
           <a:solidFill>
-            <a:srgbClr val="1C2430"/>
+            <a:srgbClr val="F6F4F0"/>
           </a:solidFill>
           <a:ln/>
         </p:spPr>
@@ -3367,26 +3401,26 @@
         </p:nvSpPr>
         <p:spPr>
           <a:xfrm>
-            <a:off x="640080" y="1417320"/>
-            <a:ext cx="3108960" cy="320040"/>
-          </a:xfrm>
-          <a:prstGeom prst="rect">
-            <a:avLst/>
-          </a:prstGeom>
-          <a:noFill/>
-          <a:ln/>
-        </p:spPr>
-        <p:txBody>
-          <a:bodyPr wrap="square" lIns="0" tIns="0" rIns="0" bIns="0" rtlCol="0" anchor="ctr"/>
-          <a:lstStyle/>
-          <a:p>
-            <a:pPr indent="0" marL="0">
-              <a:buNone/>
-            </a:pPr>
-            <a:r>
-              <a:rPr lang="en-US" sz="1300" dirty="0">
-                <a:solidFill>
-                  <a:srgbClr val="E8C39E"/>
+            <a:off x="868680" y="1371600"/>
+            <a:ext cx="3063240" cy="320040"/>
+          </a:xfrm>
+          <a:prstGeom prst="rect">
+            <a:avLst/>
+          </a:prstGeom>
+          <a:noFill/>
+          <a:ln/>
+        </p:spPr>
+        <p:txBody>
+          <a:bodyPr wrap="square" lIns="0" tIns="0" rIns="0" bIns="0" rtlCol="0" anchor="ctr"/>
+          <a:lstStyle/>
+          <a:p>
+            <a:pPr indent="0" marL="0">
+              <a:buNone/>
+            </a:pPr>
+            <a:r>
+              <a:rPr lang="en-US" sz="1400" dirty="0">
+                <a:solidFill>
+                  <a:srgbClr val="1F4B6E"/>
                 </a:solidFill>
                 <a:latin typeface="Calibri" pitchFamily="34" charset="0"/>
                 <a:ea typeface="Calibri" pitchFamily="34" charset="-122"/>
@@ -3394,7 +3428,7 @@
               </a:rPr>
               <a:t>Описание</a:t>
             </a:r>
-            <a:endParaRPr lang="en-US" sz="1300" dirty="0"/>
+            <a:endParaRPr lang="en-US" sz="1400" dirty="0"/>
           </a:p>
         </p:txBody>
       </p:sp>
@@ -3406,8 +3440,8 @@
         </p:nvSpPr>
         <p:spPr>
           <a:xfrm>
-            <a:off x="640080" y="1920240"/>
-            <a:ext cx="3154680" cy="1371600"/>
+            <a:off x="868680" y="1874520"/>
+            <a:ext cx="3063240" cy="1554480"/>
           </a:xfrm>
           <a:prstGeom prst="rect">
             <a:avLst/>
@@ -3425,7 +3459,7 @@
             <a:r>
               <a:rPr lang="en-US" sz="2200" dirty="0">
                 <a:solidFill>
-                  <a:srgbClr val="F4F1EA"/>
+                  <a:srgbClr val="1C1C1C"/>
                 </a:solidFill>
                 <a:latin typeface="Georgia" pitchFamily="34" charset="0"/>
                 <a:ea typeface="Georgia" pitchFamily="34" charset="-122"/>
@@ -3445,34 +3479,34 @@
         </p:nvSpPr>
         <p:spPr>
           <a:xfrm>
-            <a:off x="640080" y="3566160"/>
-            <a:ext cx="3154680" cy="1371600"/>
-          </a:xfrm>
-          <a:prstGeom prst="rect">
-            <a:avLst/>
-          </a:prstGeom>
-          <a:noFill/>
-          <a:ln/>
-        </p:spPr>
-        <p:txBody>
-          <a:bodyPr wrap="square" lIns="0" tIns="0" rIns="0" bIns="0" rtlCol="0" anchor="ctr"/>
-          <a:lstStyle/>
-          <a:p>
-            <a:pPr indent="0" marL="0">
-              <a:buNone/>
-            </a:pPr>
-            <a:r>
-              <a:rPr lang="en-US" sz="1500" dirty="0">
-                <a:solidFill>
-                  <a:srgbClr val="9AA3B2"/>
-                </a:solidFill>
-                <a:latin typeface="Calibri" pitchFamily="34" charset="0"/>
-                <a:ea typeface="Calibri" pitchFamily="34" charset="-122"/>
-                <a:cs typeface="Calibri" pitchFamily="34" charset="-120"/>
-              </a:rPr>
-              <a:t>Верно как сдвиг объекта: с запрета действия на соответствие задаче.</a:t>
-            </a:r>
-            <a:endParaRPr lang="en-US" sz="1500" dirty="0"/>
+            <a:off x="868680" y="3657600"/>
+            <a:ext cx="3063240" cy="1463040"/>
+          </a:xfrm>
+          <a:prstGeom prst="rect">
+            <a:avLst/>
+          </a:prstGeom>
+          <a:noFill/>
+          <a:ln/>
+        </p:spPr>
+        <p:txBody>
+          <a:bodyPr wrap="square" lIns="0" tIns="0" rIns="0" bIns="0" rtlCol="0" anchor="ctr"/>
+          <a:lstStyle/>
+          <a:p>
+            <a:pPr indent="0" marL="0">
+              <a:buNone/>
+            </a:pPr>
+            <a:r>
+              <a:rPr lang="en-US" sz="1600" dirty="0">
+                <a:solidFill>
+                  <a:srgbClr val="5E6670"/>
+                </a:solidFill>
+                <a:latin typeface="Calibri" pitchFamily="34" charset="0"/>
+                <a:ea typeface="Calibri" pitchFamily="34" charset="-122"/>
+                <a:cs typeface="Calibri" pitchFamily="34" charset="-120"/>
+              </a:rPr>
+              <a:t>Верно как сдвиг: с запрета действия на соответствие задаче.</a:t>
+            </a:r>
+            <a:endParaRPr lang="en-US" sz="1600" dirty="0"/>
           </a:p>
         </p:txBody>
       </p:sp>
@@ -3484,16 +3518,16 @@
         </p:nvSpPr>
         <p:spPr>
           <a:xfrm>
-            <a:off x="4251960" y="1188720"/>
-            <a:ext cx="3611880" cy="4206240"/>
+            <a:off x="4389120" y="1143000"/>
+            <a:ext cx="3520440" cy="4434840"/>
           </a:xfrm>
           <a:prstGeom prst="roundRect">
             <a:avLst>
-              <a:gd name="adj" fmla="val 2025"/>
+              <a:gd name="adj" fmla="val 1558"/>
             </a:avLst>
           </a:prstGeom>
           <a:solidFill>
-            <a:srgbClr val="1C2430"/>
+            <a:srgbClr val="F6F4F0"/>
           </a:solidFill>
           <a:ln/>
         </p:spPr>
@@ -3506,26 +3540,26 @@
         </p:nvSpPr>
         <p:spPr>
           <a:xfrm>
-            <a:off x="4480560" y="1417320"/>
-            <a:ext cx="3108960" cy="320040"/>
-          </a:xfrm>
-          <a:prstGeom prst="rect">
-            <a:avLst/>
-          </a:prstGeom>
-          <a:noFill/>
-          <a:ln/>
-        </p:spPr>
-        <p:txBody>
-          <a:bodyPr wrap="square" lIns="0" tIns="0" rIns="0" bIns="0" rtlCol="0" anchor="ctr"/>
-          <a:lstStyle/>
-          <a:p>
-            <a:pPr indent="0" marL="0">
-              <a:buNone/>
-            </a:pPr>
-            <a:r>
-              <a:rPr lang="en-US" sz="1300" dirty="0">
-                <a:solidFill>
-                  <a:srgbClr val="E8C39E"/>
+            <a:off x="4617720" y="1371600"/>
+            <a:ext cx="3063240" cy="320040"/>
+          </a:xfrm>
+          <a:prstGeom prst="rect">
+            <a:avLst/>
+          </a:prstGeom>
+          <a:noFill/>
+          <a:ln/>
+        </p:spPr>
+        <p:txBody>
+          <a:bodyPr wrap="square" lIns="0" tIns="0" rIns="0" bIns="0" rtlCol="0" anchor="ctr"/>
+          <a:lstStyle/>
+          <a:p>
+            <a:pPr indent="0" marL="0">
+              <a:buNone/>
+            </a:pPr>
+            <a:r>
+              <a:rPr lang="en-US" sz="1400" dirty="0">
+                <a:solidFill>
+                  <a:srgbClr val="1F4B6E"/>
                 </a:solidFill>
                 <a:latin typeface="Calibri" pitchFamily="34" charset="0"/>
                 <a:ea typeface="Calibri" pitchFamily="34" charset="-122"/>
@@ -3533,7 +3567,7 @@
               </a:rPr>
               <a:t>Техника</a:t>
             </a:r>
-            <a:endParaRPr lang="en-US" sz="1300" dirty="0"/>
+            <a:endParaRPr lang="en-US" sz="1400" dirty="0"/>
           </a:p>
         </p:txBody>
       </p:sp>
@@ -3545,8 +3579,8 @@
         </p:nvSpPr>
         <p:spPr>
           <a:xfrm>
-            <a:off x="4480560" y="1920240"/>
-            <a:ext cx="3154680" cy="1371600"/>
+            <a:off x="4617720" y="1874520"/>
+            <a:ext cx="3063240" cy="1554480"/>
           </a:xfrm>
           <a:prstGeom prst="rect">
             <a:avLst/>
@@ -3564,7 +3598,7 @@
             <a:r>
               <a:rPr lang="en-US" sz="2200" dirty="0">
                 <a:solidFill>
-                  <a:srgbClr val="F4F1EA"/>
+                  <a:srgbClr val="1C1C1C"/>
                 </a:solidFill>
                 <a:latin typeface="Georgia" pitchFamily="34" charset="0"/>
                 <a:ea typeface="Georgia" pitchFamily="34" charset="-122"/>
@@ -3584,26 +3618,26 @@
         </p:nvSpPr>
         <p:spPr>
           <a:xfrm>
-            <a:off x="4480560" y="3566160"/>
-            <a:ext cx="3154680" cy="1371600"/>
-          </a:xfrm>
-          <a:prstGeom prst="rect">
-            <a:avLst/>
-          </a:prstGeom>
-          <a:noFill/>
-          <a:ln/>
-        </p:spPr>
-        <p:txBody>
-          <a:bodyPr wrap="square" lIns="0" tIns="0" rIns="0" bIns="0" rtlCol="0" anchor="ctr"/>
-          <a:lstStyle/>
-          <a:p>
-            <a:pPr indent="0" marL="0">
-              <a:buNone/>
-            </a:pPr>
-            <a:r>
-              <a:rPr lang="en-US" sz="1500" dirty="0">
-                <a:solidFill>
-                  <a:srgbClr val="9AA3B2"/>
+            <a:off x="4617720" y="3657600"/>
+            <a:ext cx="3063240" cy="1463040"/>
+          </a:xfrm>
+          <a:prstGeom prst="rect">
+            <a:avLst/>
+          </a:prstGeom>
+          <a:noFill/>
+          <a:ln/>
+        </p:spPr>
+        <p:txBody>
+          <a:bodyPr wrap="square" lIns="0" tIns="0" rIns="0" bIns="0" rtlCol="0" anchor="ctr"/>
+          <a:lstStyle/>
+          <a:p>
+            <a:pPr indent="0" marL="0">
+              <a:buNone/>
+            </a:pPr>
+            <a:r>
+              <a:rPr lang="en-US" sz="1600" dirty="0">
+                <a:solidFill>
+                  <a:srgbClr val="5E6670"/>
                 </a:solidFill>
                 <a:latin typeface="Calibri" pitchFamily="34" charset="0"/>
                 <a:ea typeface="Calibri" pitchFamily="34" charset="-122"/>
@@ -3611,7 +3645,7 @@
               </a:rPr>
               <a:t>Слишком сильно. Это цель управления, не свойство модели.</a:t>
             </a:r>
-            <a:endParaRPr lang="en-US" sz="1500" dirty="0"/>
+            <a:endParaRPr lang="en-US" sz="1600" dirty="0"/>
           </a:p>
         </p:txBody>
       </p:sp>
@@ -3623,16 +3657,16 @@
         </p:nvSpPr>
         <p:spPr>
           <a:xfrm>
-            <a:off x="8092440" y="1188720"/>
-            <a:ext cx="3611880" cy="4206240"/>
+            <a:off x="8138160" y="1143000"/>
+            <a:ext cx="3520440" cy="4434840"/>
           </a:xfrm>
           <a:prstGeom prst="roundRect">
             <a:avLst>
-              <a:gd name="adj" fmla="val 2025"/>
+              <a:gd name="adj" fmla="val 1558"/>
             </a:avLst>
           </a:prstGeom>
           <a:solidFill>
-            <a:srgbClr val="1C2430"/>
+            <a:srgbClr val="F6F4F0"/>
           </a:solidFill>
           <a:ln/>
         </p:spPr>
@@ -3645,26 +3679,26 @@
         </p:nvSpPr>
         <p:spPr>
           <a:xfrm>
-            <a:off x="8321040" y="1417320"/>
-            <a:ext cx="3108960" cy="320040"/>
-          </a:xfrm>
-          <a:prstGeom prst="rect">
-            <a:avLst/>
-          </a:prstGeom>
-          <a:noFill/>
-          <a:ln/>
-        </p:spPr>
-        <p:txBody>
-          <a:bodyPr wrap="square" lIns="0" tIns="0" rIns="0" bIns="0" rtlCol="0" anchor="ctr"/>
-          <a:lstStyle/>
-          <a:p>
-            <a:pPr indent="0" marL="0">
-              <a:buNone/>
-            </a:pPr>
-            <a:r>
-              <a:rPr lang="en-US" sz="1300" dirty="0">
-                <a:solidFill>
-                  <a:srgbClr val="E8C39E"/>
+            <a:off x="8366760" y="1371600"/>
+            <a:ext cx="3063240" cy="320040"/>
+          </a:xfrm>
+          <a:prstGeom prst="rect">
+            <a:avLst/>
+          </a:prstGeom>
+          <a:noFill/>
+          <a:ln/>
+        </p:spPr>
+        <p:txBody>
+          <a:bodyPr wrap="square" lIns="0" tIns="0" rIns="0" bIns="0" rtlCol="0" anchor="ctr"/>
+          <a:lstStyle/>
+          <a:p>
+            <a:pPr indent="0" marL="0">
+              <a:buNone/>
+            </a:pPr>
+            <a:r>
+              <a:rPr lang="en-US" sz="1400" dirty="0">
+                <a:solidFill>
+                  <a:srgbClr val="1F4B6E"/>
                 </a:solidFill>
                 <a:latin typeface="Calibri" pitchFamily="34" charset="0"/>
                 <a:ea typeface="Calibri" pitchFamily="34" charset="-122"/>
@@ -3672,7 +3706,7 @@
               </a:rPr>
               <a:t>Норма</a:t>
             </a:r>
-            <a:endParaRPr lang="en-US" sz="1300" dirty="0"/>
+            <a:endParaRPr lang="en-US" sz="1400" dirty="0"/>
           </a:p>
         </p:txBody>
       </p:sp>
@@ -3684,8 +3718,8 @@
         </p:nvSpPr>
         <p:spPr>
           <a:xfrm>
-            <a:off x="8321040" y="1920240"/>
-            <a:ext cx="3154680" cy="1371600"/>
+            <a:off x="8366760" y="1874520"/>
+            <a:ext cx="3063240" cy="1554480"/>
           </a:xfrm>
           <a:prstGeom prst="rect">
             <a:avLst/>
@@ -3703,7 +3737,7 @@
             <a:r>
               <a:rPr lang="en-US" sz="2200" dirty="0">
                 <a:solidFill>
-                  <a:srgbClr val="F4F1EA"/>
+                  <a:srgbClr val="1C1C1C"/>
                 </a:solidFill>
                 <a:latin typeface="Georgia" pitchFamily="34" charset="0"/>
                 <a:ea typeface="Georgia" pitchFamily="34" charset="-122"/>
@@ -3723,26 +3757,26 @@
         </p:nvSpPr>
         <p:spPr>
           <a:xfrm>
-            <a:off x="8321040" y="3566160"/>
-            <a:ext cx="3154680" cy="1371600"/>
-          </a:xfrm>
-          <a:prstGeom prst="rect">
-            <a:avLst/>
-          </a:prstGeom>
-          <a:noFill/>
-          <a:ln/>
-        </p:spPr>
-        <p:txBody>
-          <a:bodyPr wrap="square" lIns="0" tIns="0" rIns="0" bIns="0" rtlCol="0" anchor="ctr"/>
-          <a:lstStyle/>
-          <a:p>
-            <a:pPr indent="0" marL="0">
-              <a:buNone/>
-            </a:pPr>
-            <a:r>
-              <a:rPr lang="en-US" sz="1500" dirty="0">
-                <a:solidFill>
-                  <a:srgbClr val="9AA3B2"/>
+            <a:off x="8366760" y="3657600"/>
+            <a:ext cx="3063240" cy="1463040"/>
+          </a:xfrm>
+          <a:prstGeom prst="rect">
+            <a:avLst/>
+          </a:prstGeom>
+          <a:noFill/>
+          <a:ln/>
+        </p:spPr>
+        <p:txBody>
+          <a:bodyPr wrap="square" lIns="0" tIns="0" rIns="0" bIns="0" rtlCol="0" anchor="ctr"/>
+          <a:lstStyle/>
+          <a:p>
+            <a:pPr indent="0" marL="0">
+              <a:buNone/>
+            </a:pPr>
+            <a:r>
+              <a:rPr lang="en-US" sz="1600" dirty="0">
+                <a:solidFill>
+                  <a:srgbClr val="5E6670"/>
                 </a:solidFill>
                 <a:latin typeface="Calibri" pitchFamily="34" charset="0"/>
                 <a:ea typeface="Calibri" pitchFamily="34" charset="-122"/>
@@ -3750,7 +3784,7 @@
               </a:rPr>
               <a:t>Самый крепкий тезис. Модель не субъект права.</a:t>
             </a:r>
-            <a:endParaRPr lang="en-US" sz="1500" dirty="0"/>
+            <a:endParaRPr lang="en-US" sz="1600" dirty="0"/>
           </a:p>
         </p:txBody>
       </p:sp>
@@ -3768,7 +3802,7 @@
     <p:bg>
       <p:bgPr>
         <a:solidFill>
-          <a:srgbClr val="12151C"/>
+          <a:srgbClr val="FFFFFF"/>
         </a:solidFill>
       </p:bgPr>
     </p:bg>
@@ -3794,14 +3828,14 @@
         </p:nvSpPr>
         <p:spPr>
           <a:xfrm>
-            <a:off x="0" y="0"/>
-            <a:ext cx="109728" cy="6858000"/>
+            <a:off x="502920" y="6446520"/>
+            <a:ext cx="11155680" cy="9144"/>
           </a:xfrm>
           <a:prstGeom prst="rect">
             <a:avLst/>
           </a:prstGeom>
           <a:solidFill>
-            <a:srgbClr val="E8C39E"/>
+            <a:srgbClr val="D9D4CC"/>
           </a:solidFill>
           <a:ln/>
         </p:spPr>
@@ -3814,34 +3848,34 @@
         </p:nvSpPr>
         <p:spPr>
           <a:xfrm>
-            <a:off x="411480" y="6510528"/>
-            <a:ext cx="7315200" cy="219456"/>
-          </a:xfrm>
-          <a:prstGeom prst="rect">
-            <a:avLst/>
-          </a:prstGeom>
-          <a:noFill/>
-          <a:ln/>
-        </p:spPr>
-        <p:txBody>
-          <a:bodyPr wrap="square" lIns="0" tIns="0" rIns="0" bIns="0" rtlCol="0" anchor="ctr"/>
-          <a:lstStyle/>
-          <a:p>
-            <a:pPr indent="0" marL="0">
-              <a:buNone/>
-            </a:pPr>
-            <a:r>
-              <a:rPr lang="en-US" sz="1100" dirty="0">
-                <a:solidFill>
-                  <a:srgbClr val="9AA3B2"/>
-                </a:solidFill>
-                <a:latin typeface="Calibri" pitchFamily="34" charset="0"/>
-                <a:ea typeface="Calibri" pitchFamily="34" charset="-122"/>
-                <a:cs typeface="Calibri" pitchFamily="34" charset="-120"/>
-              </a:rPr>
-              <a:t>t.me/yury/1300  ·  7 октября 2026</a:t>
-            </a:r>
-            <a:endParaRPr lang="en-US" sz="1100" dirty="0"/>
+            <a:off x="502920" y="6510528"/>
+            <a:ext cx="5486400" cy="219456"/>
+          </a:xfrm>
+          <a:prstGeom prst="rect">
+            <a:avLst/>
+          </a:prstGeom>
+          <a:noFill/>
+          <a:ln/>
+        </p:spPr>
+        <p:txBody>
+          <a:bodyPr wrap="square" lIns="0" tIns="0" rIns="0" bIns="0" rtlCol="0" anchor="ctr"/>
+          <a:lstStyle/>
+          <a:p>
+            <a:pPr indent="0" marL="0">
+              <a:buNone/>
+            </a:pPr>
+            <a:r>
+              <a:rPr lang="en-US" sz="1200" dirty="0">
+                <a:solidFill>
+                  <a:srgbClr val="5E6670"/>
+                </a:solidFill>
+                <a:latin typeface="Calibri" pitchFamily="34" charset="0"/>
+                <a:ea typeface="Calibri" pitchFamily="34" charset="-122"/>
+                <a:cs typeface="Calibri" pitchFamily="34" charset="-120"/>
+              </a:rPr>
+              <a:t>t.me/yury/1300</a:t>
+            </a:r>
+            <a:endParaRPr lang="en-US" sz="1200" dirty="0"/>
           </a:p>
         </p:txBody>
       </p:sp>
@@ -3853,8 +3887,8 @@
         </p:nvSpPr>
         <p:spPr>
           <a:xfrm>
-            <a:off x="10424160" y="6510528"/>
-            <a:ext cx="1280160" cy="219456"/>
+            <a:off x="9418320" y="6510528"/>
+            <a:ext cx="2240280" cy="219456"/>
           </a:xfrm>
           <a:prstGeom prst="rect">
             <a:avLst/>
@@ -3870,9 +3904,9 @@
               <a:buNone/>
             </a:pPr>
             <a:r>
-              <a:rPr lang="en-US" sz="1100" dirty="0">
-                <a:solidFill>
-                  <a:srgbClr val="9AA3B2"/>
+              <a:rPr lang="en-US" sz="1200" dirty="0">
+                <a:solidFill>
+                  <a:srgbClr val="5E6670"/>
                 </a:solidFill>
                 <a:latin typeface="Calibri" pitchFamily="34" charset="0"/>
                 <a:ea typeface="Calibri" pitchFamily="34" charset="-122"/>
@@ -3880,7 +3914,7 @@
               </a:rPr>
               <a:t>5 / 10</a:t>
             </a:r>
-            <a:endParaRPr lang="en-US" sz="1100" dirty="0"/>
+            <a:endParaRPr lang="en-US" sz="1200" dirty="0"/>
           </a:p>
         </p:txBody>
       </p:sp>
@@ -3892,8 +3926,8 @@
         </p:nvSpPr>
         <p:spPr>
           <a:xfrm>
-            <a:off x="457200" y="292608"/>
-            <a:ext cx="10972800" cy="384048"/>
+            <a:off x="640080" y="347472"/>
+            <a:ext cx="10972800" cy="411480"/>
           </a:xfrm>
           <a:prstGeom prst="rect">
             <a:avLst/>
@@ -3911,7 +3945,7 @@
             <a:r>
               <a:rPr lang="en-US" sz="2800" dirty="0">
                 <a:solidFill>
-                  <a:srgbClr val="F4F1EA"/>
+                  <a:srgbClr val="1C1C1C"/>
                 </a:solidFill>
                 <a:latin typeface="Georgia" pitchFamily="34" charset="0"/>
                 <a:ea typeface="Georgia" pitchFamily="34" charset="-122"/>
@@ -3931,7 +3965,7 @@
         </p:nvSpPr>
         <p:spPr>
           <a:xfrm>
-            <a:off x="502920" y="1005840"/>
+            <a:off x="640080" y="1051560"/>
             <a:ext cx="10972800" cy="329184"/>
           </a:xfrm>
           <a:prstGeom prst="rect">
@@ -3950,7 +3984,7 @@
             <a:r>
               <a:rPr lang="en-US" sz="1800" dirty="0">
                 <a:solidFill>
-                  <a:srgbClr val="F4F1EA"/>
+                  <a:srgbClr val="1C1C1C"/>
                 </a:solidFill>
                 <a:latin typeface="Calibri" pitchFamily="34" charset="0"/>
                 <a:ea typeface="Calibri" pitchFamily="34" charset="-122"/>
@@ -3970,26 +4004,26 @@
         </p:nvSpPr>
         <p:spPr>
           <a:xfrm>
-            <a:off x="502920" y="1371600"/>
-            <a:ext cx="10972800" cy="548640"/>
-          </a:xfrm>
-          <a:prstGeom prst="rect">
-            <a:avLst/>
-          </a:prstGeom>
-          <a:noFill/>
-          <a:ln/>
-        </p:spPr>
-        <p:txBody>
-          <a:bodyPr wrap="square" lIns="0" tIns="0" rIns="0" bIns="0" rtlCol="0" anchor="ctr"/>
-          <a:lstStyle/>
-          <a:p>
-            <a:pPr indent="0" marL="0">
-              <a:buNone/>
-            </a:pPr>
-            <a:r>
-              <a:rPr lang="en-US" sz="1500" dirty="0">
-                <a:solidFill>
-                  <a:srgbClr val="9AA3B2"/>
+            <a:off x="640080" y="1417320"/>
+            <a:ext cx="10972800" cy="502920"/>
+          </a:xfrm>
+          <a:prstGeom prst="rect">
+            <a:avLst/>
+          </a:prstGeom>
+          <a:noFill/>
+          <a:ln/>
+        </p:spPr>
+        <p:txBody>
+          <a:bodyPr wrap="square" lIns="0" tIns="0" rIns="0" bIns="0" rtlCol="0" anchor="ctr"/>
+          <a:lstStyle/>
+          <a:p>
+            <a:pPr indent="0" marL="0">
+              <a:buNone/>
+            </a:pPr>
+            <a:r>
+              <a:rPr lang="en-US" sz="1600" dirty="0">
+                <a:solidFill>
+                  <a:srgbClr val="5E6670"/>
                 </a:solidFill>
                 <a:latin typeface="Calibri" pitchFamily="34" charset="0"/>
                 <a:ea typeface="Calibri" pitchFamily="34" charset="-122"/>
@@ -3997,7 +4031,7 @@
               </a:rPr>
               <a:t>Открытая цель плюс «нельзя класс действий» часто равна отказу от задачи, а не удержанию в ней.</a:t>
             </a:r>
-            <a:endParaRPr lang="en-US" sz="1500" dirty="0"/>
+            <a:endParaRPr lang="en-US" sz="1600" dirty="0"/>
           </a:p>
         </p:txBody>
       </p:sp>
@@ -4009,7 +4043,7 @@
         </p:nvSpPr>
         <p:spPr>
           <a:xfrm>
-            <a:off x="502920" y="2240280"/>
+            <a:off x="640080" y="2286000"/>
             <a:ext cx="10972800" cy="329184"/>
           </a:xfrm>
           <a:prstGeom prst="rect">
@@ -4028,7 +4062,7 @@
             <a:r>
               <a:rPr lang="en-US" sz="1800" dirty="0">
                 <a:solidFill>
-                  <a:srgbClr val="F4F1EA"/>
+                  <a:srgbClr val="1C1C1C"/>
                 </a:solidFill>
                 <a:latin typeface="Calibri" pitchFamily="34" charset="0"/>
                 <a:ea typeface="Calibri" pitchFamily="34" charset="-122"/>
@@ -4048,26 +4082,26 @@
         </p:nvSpPr>
         <p:spPr>
           <a:xfrm>
-            <a:off x="502920" y="2606040"/>
-            <a:ext cx="10972800" cy="548640"/>
-          </a:xfrm>
-          <a:prstGeom prst="rect">
-            <a:avLst/>
-          </a:prstGeom>
-          <a:noFill/>
-          <a:ln/>
-        </p:spPr>
-        <p:txBody>
-          <a:bodyPr wrap="square" lIns="0" tIns="0" rIns="0" bIns="0" rtlCol="0" anchor="ctr"/>
-          <a:lstStyle/>
-          <a:p>
-            <a:pPr indent="0" marL="0">
-              <a:buNone/>
-            </a:pPr>
-            <a:r>
-              <a:rPr lang="en-US" sz="1500" dirty="0">
-                <a:solidFill>
-                  <a:srgbClr val="9AA3B2"/>
+            <a:off x="640080" y="2651760"/>
+            <a:ext cx="10972800" cy="502920"/>
+          </a:xfrm>
+          <a:prstGeom prst="rect">
+            <a:avLst/>
+          </a:prstGeom>
+          <a:noFill/>
+          <a:ln/>
+        </p:spPr>
+        <p:txBody>
+          <a:bodyPr wrap="square" lIns="0" tIns="0" rIns="0" bIns="0" rtlCol="0" anchor="ctr"/>
+          <a:lstStyle/>
+          <a:p>
+            <a:pPr indent="0" marL="0">
+              <a:buNone/>
+            </a:pPr>
+            <a:r>
+              <a:rPr lang="en-US" sz="1600" dirty="0">
+                <a:solidFill>
+                  <a:srgbClr val="5E6670"/>
                 </a:solidFill>
                 <a:latin typeface="Calibri" pitchFamily="34" charset="0"/>
                 <a:ea typeface="Calibri" pitchFamily="34" charset="-122"/>
@@ -4075,7 +4109,7 @@
               </a:rPr>
               <a:t>Журнал действий агента больше, чем внимание владельца. Второй контур нужен.</a:t>
             </a:r>
-            <a:endParaRPr lang="en-US" sz="1500" dirty="0"/>
+            <a:endParaRPr lang="en-US" sz="1600" dirty="0"/>
           </a:p>
         </p:txBody>
       </p:sp>
@@ -4087,7 +4121,7 @@
         </p:nvSpPr>
         <p:spPr>
           <a:xfrm>
-            <a:off x="502920" y="3474720"/>
+            <a:off x="640080" y="3520440"/>
             <a:ext cx="10972800" cy="329184"/>
           </a:xfrm>
           <a:prstGeom prst="rect">
@@ -4106,7 +4140,7 @@
             <a:r>
               <a:rPr lang="en-US" sz="1800" dirty="0">
                 <a:solidFill>
-                  <a:srgbClr val="F4F1EA"/>
+                  <a:srgbClr val="1C1C1C"/>
                 </a:solidFill>
                 <a:latin typeface="Calibri" pitchFamily="34" charset="0"/>
                 <a:ea typeface="Calibri" pitchFamily="34" charset="-122"/>
@@ -4126,34 +4160,34 @@
         </p:nvSpPr>
         <p:spPr>
           <a:xfrm>
-            <a:off x="502920" y="3840480"/>
-            <a:ext cx="10972800" cy="548640"/>
-          </a:xfrm>
-          <a:prstGeom prst="rect">
-            <a:avLst/>
-          </a:prstGeom>
-          <a:noFill/>
-          <a:ln/>
-        </p:spPr>
-        <p:txBody>
-          <a:bodyPr wrap="square" lIns="0" tIns="0" rIns="0" bIns="0" rtlCol="0" anchor="ctr"/>
-          <a:lstStyle/>
-          <a:p>
-            <a:pPr indent="0" marL="0">
-              <a:buNone/>
-            </a:pPr>
-            <a:r>
-              <a:rPr lang="en-US" sz="1500" dirty="0">
-                <a:solidFill>
-                  <a:srgbClr val="9AA3B2"/>
-                </a:solidFill>
-                <a:latin typeface="Calibri" pitchFamily="34" charset="0"/>
-                <a:ea typeface="Calibri" pitchFamily="34" charset="-122"/>
-                <a:cs typeface="Calibri" pitchFamily="34" charset="-120"/>
-              </a:rPr>
-              <a:t>Строитель, атакующий и детектор в песочнице — это purple team, не лозунг.</a:t>
-            </a:r>
-            <a:endParaRPr lang="en-US" sz="1500" dirty="0"/>
+            <a:off x="640080" y="3886200"/>
+            <a:ext cx="10972800" cy="502920"/>
+          </a:xfrm>
+          <a:prstGeom prst="rect">
+            <a:avLst/>
+          </a:prstGeom>
+          <a:noFill/>
+          <a:ln/>
+        </p:spPr>
+        <p:txBody>
+          <a:bodyPr wrap="square" lIns="0" tIns="0" rIns="0" bIns="0" rtlCol="0" anchor="ctr"/>
+          <a:lstStyle/>
+          <a:p>
+            <a:pPr indent="0" marL="0">
+              <a:buNone/>
+            </a:pPr>
+            <a:r>
+              <a:rPr lang="en-US" sz="1600" dirty="0">
+                <a:solidFill>
+                  <a:srgbClr val="5E6670"/>
+                </a:solidFill>
+                <a:latin typeface="Calibri" pitchFamily="34" charset="0"/>
+                <a:ea typeface="Calibri" pitchFamily="34" charset="-122"/>
+                <a:cs typeface="Calibri" pitchFamily="34" charset="-120"/>
+              </a:rPr>
+              <a:t>Строитель, атакующий и детектор в песочнице — проверка, не доказательство.</a:t>
+            </a:r>
+            <a:endParaRPr lang="en-US" sz="1600" dirty="0"/>
           </a:p>
         </p:txBody>
       </p:sp>
@@ -4165,7 +4199,7 @@
         </p:nvSpPr>
         <p:spPr>
           <a:xfrm>
-            <a:off x="502920" y="4709160"/>
+            <a:off x="640080" y="4754880"/>
             <a:ext cx="10972800" cy="329184"/>
           </a:xfrm>
           <a:prstGeom prst="rect">
@@ -4184,7 +4218,7 @@
             <a:r>
               <a:rPr lang="en-US" sz="1800" dirty="0">
                 <a:solidFill>
-                  <a:srgbClr val="F4F1EA"/>
+                  <a:srgbClr val="1C1C1C"/>
                 </a:solidFill>
                 <a:latin typeface="Calibri" pitchFamily="34" charset="0"/>
                 <a:ea typeface="Calibri" pitchFamily="34" charset="-122"/>
@@ -4204,34 +4238,34 @@
         </p:nvSpPr>
         <p:spPr>
           <a:xfrm>
-            <a:off x="502920" y="5074920"/>
-            <a:ext cx="10972800" cy="548640"/>
-          </a:xfrm>
-          <a:prstGeom prst="rect">
-            <a:avLst/>
-          </a:prstGeom>
-          <a:noFill/>
-          <a:ln/>
-        </p:spPr>
-        <p:txBody>
-          <a:bodyPr wrap="square" lIns="0" tIns="0" rIns="0" bIns="0" rtlCol="0" anchor="ctr"/>
-          <a:lstStyle/>
-          <a:p>
-            <a:pPr indent="0" marL="0">
-              <a:buNone/>
-            </a:pPr>
-            <a:r>
-              <a:rPr lang="en-US" sz="1500" dirty="0">
-                <a:solidFill>
-                  <a:srgbClr val="9AA3B2"/>
-                </a:solidFill>
-                <a:latin typeface="Calibri" pitchFamily="34" charset="0"/>
-                <a:ea typeface="Calibri" pitchFamily="34" charset="-122"/>
-                <a:cs typeface="Calibri" pitchFamily="34" charset="-120"/>
-              </a:rPr>
-              <a:t>Совпадает с линией форума 6 октября: границы полномочий агентов ещё не заданы, но вина уже не на модели.</a:t>
-            </a:r>
-            <a:endParaRPr lang="en-US" sz="1500" dirty="0"/>
+            <a:off x="640080" y="5120640"/>
+            <a:ext cx="10972800" cy="502920"/>
+          </a:xfrm>
+          <a:prstGeom prst="rect">
+            <a:avLst/>
+          </a:prstGeom>
+          <a:noFill/>
+          <a:ln/>
+        </p:spPr>
+        <p:txBody>
+          <a:bodyPr wrap="square" lIns="0" tIns="0" rIns="0" bIns="0" rtlCol="0" anchor="ctr"/>
+          <a:lstStyle/>
+          <a:p>
+            <a:pPr indent="0" marL="0">
+              <a:buNone/>
+            </a:pPr>
+            <a:r>
+              <a:rPr lang="en-US" sz="1600" dirty="0">
+                <a:solidFill>
+                  <a:srgbClr val="5E6670"/>
+                </a:solidFill>
+                <a:latin typeface="Calibri" pitchFamily="34" charset="0"/>
+                <a:ea typeface="Calibri" pitchFamily="34" charset="-122"/>
+                <a:cs typeface="Calibri" pitchFamily="34" charset="-120"/>
+              </a:rPr>
+              <a:t>6 октября на том же форуме границы полномочий агентов названы задачей. Вина уже не на модели.</a:t>
+            </a:r>
+            <a:endParaRPr lang="en-US" sz="1600" dirty="0"/>
           </a:p>
         </p:txBody>
       </p:sp>
@@ -4249,7 +4283,7 @@
     <p:bg>
       <p:bgPr>
         <a:solidFill>
-          <a:srgbClr val="12151C"/>
+          <a:srgbClr val="FFFFFF"/>
         </a:solidFill>
       </p:bgPr>
     </p:bg>
@@ -4275,14 +4309,14 @@
         </p:nvSpPr>
         <p:spPr>
           <a:xfrm>
-            <a:off x="0" y="0"/>
-            <a:ext cx="109728" cy="6858000"/>
+            <a:off x="502920" y="6446520"/>
+            <a:ext cx="11155680" cy="9144"/>
           </a:xfrm>
           <a:prstGeom prst="rect">
             <a:avLst/>
           </a:prstGeom>
           <a:solidFill>
-            <a:srgbClr val="E8C39E"/>
+            <a:srgbClr val="D9D4CC"/>
           </a:solidFill>
           <a:ln/>
         </p:spPr>
@@ -4295,34 +4329,34 @@
         </p:nvSpPr>
         <p:spPr>
           <a:xfrm>
-            <a:off x="411480" y="6510528"/>
-            <a:ext cx="7315200" cy="219456"/>
-          </a:xfrm>
-          <a:prstGeom prst="rect">
-            <a:avLst/>
-          </a:prstGeom>
-          <a:noFill/>
-          <a:ln/>
-        </p:spPr>
-        <p:txBody>
-          <a:bodyPr wrap="square" lIns="0" tIns="0" rIns="0" bIns="0" rtlCol="0" anchor="ctr"/>
-          <a:lstStyle/>
-          <a:p>
-            <a:pPr indent="0" marL="0">
-              <a:buNone/>
-            </a:pPr>
-            <a:r>
-              <a:rPr lang="en-US" sz="1100" dirty="0">
-                <a:solidFill>
-                  <a:srgbClr val="9AA3B2"/>
-                </a:solidFill>
-                <a:latin typeface="Calibri" pitchFamily="34" charset="0"/>
-                <a:ea typeface="Calibri" pitchFamily="34" charset="-122"/>
-                <a:cs typeface="Calibri" pitchFamily="34" charset="-120"/>
-              </a:rPr>
-              <a:t>t.me/yury/1300  ·  7 октября 2026</a:t>
-            </a:r>
-            <a:endParaRPr lang="en-US" sz="1100" dirty="0"/>
+            <a:off x="502920" y="6510528"/>
+            <a:ext cx="5486400" cy="219456"/>
+          </a:xfrm>
+          <a:prstGeom prst="rect">
+            <a:avLst/>
+          </a:prstGeom>
+          <a:noFill/>
+          <a:ln/>
+        </p:spPr>
+        <p:txBody>
+          <a:bodyPr wrap="square" lIns="0" tIns="0" rIns="0" bIns="0" rtlCol="0" anchor="ctr"/>
+          <a:lstStyle/>
+          <a:p>
+            <a:pPr indent="0" marL="0">
+              <a:buNone/>
+            </a:pPr>
+            <a:r>
+              <a:rPr lang="en-US" sz="1200" dirty="0">
+                <a:solidFill>
+                  <a:srgbClr val="5E6670"/>
+                </a:solidFill>
+                <a:latin typeface="Calibri" pitchFamily="34" charset="0"/>
+                <a:ea typeface="Calibri" pitchFamily="34" charset="-122"/>
+                <a:cs typeface="Calibri" pitchFamily="34" charset="-120"/>
+              </a:rPr>
+              <a:t>t.me/yury/1300</a:t>
+            </a:r>
+            <a:endParaRPr lang="en-US" sz="1200" dirty="0"/>
           </a:p>
         </p:txBody>
       </p:sp>
@@ -4334,8 +4368,8 @@
         </p:nvSpPr>
         <p:spPr>
           <a:xfrm>
-            <a:off x="10424160" y="6510528"/>
-            <a:ext cx="1280160" cy="219456"/>
+            <a:off x="9418320" y="6510528"/>
+            <a:ext cx="2240280" cy="219456"/>
           </a:xfrm>
           <a:prstGeom prst="rect">
             <a:avLst/>
@@ -4351,9 +4385,9 @@
               <a:buNone/>
             </a:pPr>
             <a:r>
-              <a:rPr lang="en-US" sz="1100" dirty="0">
-                <a:solidFill>
-                  <a:srgbClr val="9AA3B2"/>
+              <a:rPr lang="en-US" sz="1200" dirty="0">
+                <a:solidFill>
+                  <a:srgbClr val="5E6670"/>
                 </a:solidFill>
                 <a:latin typeface="Calibri" pitchFamily="34" charset="0"/>
                 <a:ea typeface="Calibri" pitchFamily="34" charset="-122"/>
@@ -4361,7 +4395,7 @@
               </a:rPr>
               <a:t>6 / 10</a:t>
             </a:r>
-            <a:endParaRPr lang="en-US" sz="1100" dirty="0"/>
+            <a:endParaRPr lang="en-US" sz="1200" dirty="0"/>
           </a:p>
         </p:txBody>
       </p:sp>
@@ -4373,8 +4407,8 @@
         </p:nvSpPr>
         <p:spPr>
           <a:xfrm>
-            <a:off x="457200" y="292608"/>
-            <a:ext cx="10972800" cy="384048"/>
+            <a:off x="640080" y="347472"/>
+            <a:ext cx="10972800" cy="411480"/>
           </a:xfrm>
           <a:prstGeom prst="rect">
             <a:avLst/>
@@ -4392,7 +4426,7 @@
             <a:r>
               <a:rPr lang="en-US" sz="2800" dirty="0">
                 <a:solidFill>
-                  <a:srgbClr val="F4F1EA"/>
+                  <a:srgbClr val="1C1C1C"/>
                 </a:solidFill>
                 <a:latin typeface="Georgia" pitchFamily="34" charset="0"/>
                 <a:ea typeface="Georgia" pitchFamily="34" charset="-122"/>
@@ -4412,8 +4446,8 @@
         </p:nvSpPr>
         <p:spPr>
           <a:xfrm>
-            <a:off x="502920" y="1051560"/>
-            <a:ext cx="3017520" cy="640080"/>
+            <a:off x="640080" y="1097280"/>
+            <a:ext cx="3291840" cy="502920"/>
           </a:xfrm>
           <a:prstGeom prst="rect">
             <a:avLst/>
@@ -4431,7 +4465,7 @@
             <a:r>
               <a:rPr lang="en-US" sz="1800" dirty="0">
                 <a:solidFill>
-                  <a:srgbClr val="E8C39E"/>
+                  <a:srgbClr val="1F4B6E"/>
                 </a:solidFill>
                 <a:latin typeface="Georgia" pitchFamily="34" charset="0"/>
                 <a:ea typeface="Georgia" pitchFamily="34" charset="-122"/>
@@ -4451,8 +4485,8 @@
         </p:nvSpPr>
         <p:spPr>
           <a:xfrm>
-            <a:off x="3657600" y="1051560"/>
-            <a:ext cx="7772400" cy="640080"/>
+            <a:off x="4114800" y="1097280"/>
+            <a:ext cx="7315200" cy="502920"/>
           </a:xfrm>
           <a:prstGeom prst="rect">
             <a:avLst/>
@@ -4470,7 +4504,7 @@
             <a:r>
               <a:rPr lang="en-US" sz="1800" dirty="0">
                 <a:solidFill>
-                  <a:srgbClr val="F4F1EA"/>
+                  <a:srgbClr val="1C1C1C"/>
                 </a:solidFill>
                 <a:latin typeface="Calibri" pitchFamily="34" charset="0"/>
                 <a:ea typeface="Calibri" pitchFamily="34" charset="-122"/>
@@ -4490,8 +4524,8 @@
         </p:nvSpPr>
         <p:spPr>
           <a:xfrm>
-            <a:off x="502920" y="2011680"/>
-            <a:ext cx="3017520" cy="640080"/>
+            <a:off x="640080" y="2057400"/>
+            <a:ext cx="3291840" cy="502920"/>
           </a:xfrm>
           <a:prstGeom prst="rect">
             <a:avLst/>
@@ -4509,7 +4543,7 @@
             <a:r>
               <a:rPr lang="en-US" sz="1800" dirty="0">
                 <a:solidFill>
-                  <a:srgbClr val="E8C39E"/>
+                  <a:srgbClr val="1F4B6E"/>
                 </a:solidFill>
                 <a:latin typeface="Georgia" pitchFamily="34" charset="0"/>
                 <a:ea typeface="Georgia" pitchFamily="34" charset="-122"/>
@@ -4529,8 +4563,8 @@
         </p:nvSpPr>
         <p:spPr>
           <a:xfrm>
-            <a:off x="3657600" y="2011680"/>
-            <a:ext cx="7772400" cy="640080"/>
+            <a:off x="4114800" y="2057400"/>
+            <a:ext cx="7315200" cy="502920"/>
           </a:xfrm>
           <a:prstGeom prst="rect">
             <a:avLst/>
@@ -4548,7 +4582,7 @@
             <a:r>
               <a:rPr lang="en-US" sz="1800" dirty="0">
                 <a:solidFill>
-                  <a:srgbClr val="F4F1EA"/>
+                  <a:srgbClr val="1C1C1C"/>
                 </a:solidFill>
                 <a:latin typeface="Calibri" pitchFamily="34" charset="0"/>
                 <a:ea typeface="Calibri" pitchFamily="34" charset="-122"/>
@@ -4568,8 +4602,8 @@
         </p:nvSpPr>
         <p:spPr>
           <a:xfrm>
-            <a:off x="502920" y="2971800"/>
-            <a:ext cx="3017520" cy="640080"/>
+            <a:off x="640080" y="3017520"/>
+            <a:ext cx="3291840" cy="502920"/>
           </a:xfrm>
           <a:prstGeom prst="rect">
             <a:avLst/>
@@ -4587,7 +4621,7 @@
             <a:r>
               <a:rPr lang="en-US" sz="1800" dirty="0">
                 <a:solidFill>
-                  <a:srgbClr val="E8C39E"/>
+                  <a:srgbClr val="1F4B6E"/>
                 </a:solidFill>
                 <a:latin typeface="Georgia" pitchFamily="34" charset="0"/>
                 <a:ea typeface="Georgia" pitchFamily="34" charset="-122"/>
@@ -4607,8 +4641,8 @@
         </p:nvSpPr>
         <p:spPr>
           <a:xfrm>
-            <a:off x="3657600" y="2971800"/>
-            <a:ext cx="7772400" cy="640080"/>
+            <a:off x="4114800" y="3017520"/>
+            <a:ext cx="7315200" cy="502920"/>
           </a:xfrm>
           <a:prstGeom prst="rect">
             <a:avLst/>
@@ -4626,7 +4660,7 @@
             <a:r>
               <a:rPr lang="en-US" sz="1800" dirty="0">
                 <a:solidFill>
-                  <a:srgbClr val="F4F1EA"/>
+                  <a:srgbClr val="1C1C1C"/>
                 </a:solidFill>
                 <a:latin typeface="Calibri" pitchFamily="34" charset="0"/>
                 <a:ea typeface="Calibri" pitchFamily="34" charset="-122"/>
@@ -4646,8 +4680,8 @@
         </p:nvSpPr>
         <p:spPr>
           <a:xfrm>
-            <a:off x="502920" y="3931920"/>
-            <a:ext cx="3017520" cy="640080"/>
+            <a:off x="640080" y="3977640"/>
+            <a:ext cx="3291840" cy="502920"/>
           </a:xfrm>
           <a:prstGeom prst="rect">
             <a:avLst/>
@@ -4665,7 +4699,7 @@
             <a:r>
               <a:rPr lang="en-US" sz="1800" dirty="0">
                 <a:solidFill>
-                  <a:srgbClr val="E8C39E"/>
+                  <a:srgbClr val="1F4B6E"/>
                 </a:solidFill>
                 <a:latin typeface="Georgia" pitchFamily="34" charset="0"/>
                 <a:ea typeface="Georgia" pitchFamily="34" charset="-122"/>
@@ -4685,8 +4719,8 @@
         </p:nvSpPr>
         <p:spPr>
           <a:xfrm>
-            <a:off x="3657600" y="3931920"/>
-            <a:ext cx="7772400" cy="640080"/>
+            <a:off x="4114800" y="3977640"/>
+            <a:ext cx="7315200" cy="502920"/>
           </a:xfrm>
           <a:prstGeom prst="rect">
             <a:avLst/>
@@ -4704,13 +4738,13 @@
             <a:r>
               <a:rPr lang="en-US" sz="1800" dirty="0">
                 <a:solidFill>
-                  <a:srgbClr val="F4F1EA"/>
-                </a:solidFill>
-                <a:latin typeface="Calibri" pitchFamily="34" charset="0"/>
-                <a:ea typeface="Calibri" pitchFamily="34" charset="-122"/>
-                <a:cs typeface="Calibri" pitchFamily="34" charset="-120"/>
-              </a:rPr>
-              <a:t>Вторая модель ловит не всё и врёт в ту же сторону.</a:t>
+                  <a:srgbClr val="1C1C1C"/>
+                </a:solidFill>
+                <a:latin typeface="Calibri" pitchFamily="34" charset="0"/>
+                <a:ea typeface="Calibri" pitchFamily="34" charset="-122"/>
+                <a:cs typeface="Calibri" pitchFamily="34" charset="-120"/>
+              </a:rPr>
+              <a:t>Вторая модель ловит не всё и ошибается в ту же сторону.</a:t>
             </a:r>
             <a:endParaRPr lang="en-US" sz="1800" dirty="0"/>
           </a:p>
@@ -4724,8 +4758,8 @@
         </p:nvSpPr>
         <p:spPr>
           <a:xfrm>
-            <a:off x="502920" y="4892040"/>
-            <a:ext cx="3017520" cy="640080"/>
+            <a:off x="640080" y="4937760"/>
+            <a:ext cx="3291840" cy="502920"/>
           </a:xfrm>
           <a:prstGeom prst="rect">
             <a:avLst/>
@@ -4743,7 +4777,7 @@
             <a:r>
               <a:rPr lang="en-US" sz="1800" dirty="0">
                 <a:solidFill>
-                  <a:srgbClr val="E8C39E"/>
+                  <a:srgbClr val="1F4B6E"/>
                 </a:solidFill>
                 <a:latin typeface="Georgia" pitchFamily="34" charset="0"/>
                 <a:ea typeface="Georgia" pitchFamily="34" charset="-122"/>
@@ -4763,8 +4797,8 @@
         </p:nvSpPr>
         <p:spPr>
           <a:xfrm>
-            <a:off x="3657600" y="4892040"/>
-            <a:ext cx="7772400" cy="640080"/>
+            <a:off x="4114800" y="4937760"/>
+            <a:ext cx="7315200" cy="502920"/>
           </a:xfrm>
           <a:prstGeom prst="rect">
             <a:avLst/>
@@ -4782,7 +4816,7 @@
             <a:r>
               <a:rPr lang="en-US" sz="1800" dirty="0">
                 <a:solidFill>
-                  <a:srgbClr val="F4F1EA"/>
+                  <a:srgbClr val="1C1C1C"/>
                 </a:solidFill>
                 <a:latin typeface="Calibri" pitchFamily="34" charset="0"/>
                 <a:ea typeface="Calibri" pitchFamily="34" charset="-122"/>
@@ -4808,7 +4842,7 @@
     <p:bg>
       <p:bgPr>
         <a:solidFill>
-          <a:srgbClr val="12151C"/>
+          <a:srgbClr val="FFFFFF"/>
         </a:solidFill>
       </p:bgPr>
     </p:bg>
@@ -4834,14 +4868,14 @@
         </p:nvSpPr>
         <p:spPr>
           <a:xfrm>
-            <a:off x="0" y="0"/>
-            <a:ext cx="109728" cy="6858000"/>
+            <a:off x="502920" y="6446520"/>
+            <a:ext cx="11155680" cy="9144"/>
           </a:xfrm>
           <a:prstGeom prst="rect">
             <a:avLst/>
           </a:prstGeom>
           <a:solidFill>
-            <a:srgbClr val="E8C39E"/>
+            <a:srgbClr val="D9D4CC"/>
           </a:solidFill>
           <a:ln/>
         </p:spPr>
@@ -4854,34 +4888,34 @@
         </p:nvSpPr>
         <p:spPr>
           <a:xfrm>
-            <a:off x="411480" y="6510528"/>
-            <a:ext cx="7315200" cy="219456"/>
-          </a:xfrm>
-          <a:prstGeom prst="rect">
-            <a:avLst/>
-          </a:prstGeom>
-          <a:noFill/>
-          <a:ln/>
-        </p:spPr>
-        <p:txBody>
-          <a:bodyPr wrap="square" lIns="0" tIns="0" rIns="0" bIns="0" rtlCol="0" anchor="ctr"/>
-          <a:lstStyle/>
-          <a:p>
-            <a:pPr indent="0" marL="0">
-              <a:buNone/>
-            </a:pPr>
-            <a:r>
-              <a:rPr lang="en-US" sz="1100" dirty="0">
-                <a:solidFill>
-                  <a:srgbClr val="9AA3B2"/>
-                </a:solidFill>
-                <a:latin typeface="Calibri" pitchFamily="34" charset="0"/>
-                <a:ea typeface="Calibri" pitchFamily="34" charset="-122"/>
-                <a:cs typeface="Calibri" pitchFamily="34" charset="-120"/>
-              </a:rPr>
-              <a:t>t.me/yury/1300  ·  7 октября 2026</a:t>
-            </a:r>
-            <a:endParaRPr lang="en-US" sz="1100" dirty="0"/>
+            <a:off x="502920" y="6510528"/>
+            <a:ext cx="5486400" cy="219456"/>
+          </a:xfrm>
+          <a:prstGeom prst="rect">
+            <a:avLst/>
+          </a:prstGeom>
+          <a:noFill/>
+          <a:ln/>
+        </p:spPr>
+        <p:txBody>
+          <a:bodyPr wrap="square" lIns="0" tIns="0" rIns="0" bIns="0" rtlCol="0" anchor="ctr"/>
+          <a:lstStyle/>
+          <a:p>
+            <a:pPr indent="0" marL="0">
+              <a:buNone/>
+            </a:pPr>
+            <a:r>
+              <a:rPr lang="en-US" sz="1200" dirty="0">
+                <a:solidFill>
+                  <a:srgbClr val="5E6670"/>
+                </a:solidFill>
+                <a:latin typeface="Calibri" pitchFamily="34" charset="0"/>
+                <a:ea typeface="Calibri" pitchFamily="34" charset="-122"/>
+                <a:cs typeface="Calibri" pitchFamily="34" charset="-120"/>
+              </a:rPr>
+              <a:t>t.me/yury/1300</a:t>
+            </a:r>
+            <a:endParaRPr lang="en-US" sz="1200" dirty="0"/>
           </a:p>
         </p:txBody>
       </p:sp>
@@ -4893,8 +4927,8 @@
         </p:nvSpPr>
         <p:spPr>
           <a:xfrm>
-            <a:off x="10424160" y="6510528"/>
-            <a:ext cx="1280160" cy="219456"/>
+            <a:off x="9418320" y="6510528"/>
+            <a:ext cx="2240280" cy="219456"/>
           </a:xfrm>
           <a:prstGeom prst="rect">
             <a:avLst/>
@@ -4910,9 +4944,9 @@
               <a:buNone/>
             </a:pPr>
             <a:r>
-              <a:rPr lang="en-US" sz="1100" dirty="0">
-                <a:solidFill>
-                  <a:srgbClr val="9AA3B2"/>
+              <a:rPr lang="en-US" sz="1200" dirty="0">
+                <a:solidFill>
+                  <a:srgbClr val="5E6670"/>
                 </a:solidFill>
                 <a:latin typeface="Calibri" pitchFamily="34" charset="0"/>
                 <a:ea typeface="Calibri" pitchFamily="34" charset="-122"/>
@@ -4920,7 +4954,7 @@
               </a:rPr>
               <a:t>7 / 10</a:t>
             </a:r>
-            <a:endParaRPr lang="en-US" sz="1100" dirty="0"/>
+            <a:endParaRPr lang="en-US" sz="1200" dirty="0"/>
           </a:p>
         </p:txBody>
       </p:sp>
@@ -4932,7 +4966,7 @@
         </p:nvSpPr>
         <p:spPr>
           <a:xfrm>
-            <a:off x="457200" y="256032"/>
+            <a:off x="640080" y="292608"/>
             <a:ext cx="7315200" cy="365760"/>
           </a:xfrm>
           <a:prstGeom prst="rect">
@@ -4951,7 +4985,7 @@
             <a:r>
               <a:rPr lang="en-US" sz="2800" dirty="0">
                 <a:solidFill>
-                  <a:srgbClr val="F4F1EA"/>
+                  <a:srgbClr val="1C1C1C"/>
                 </a:solidFill>
                 <a:latin typeface="Georgia" pitchFamily="34" charset="0"/>
                 <a:ea typeface="Georgia" pitchFamily="34" charset="-122"/>
@@ -4971,18 +5005,23 @@
         </p:nvSpPr>
         <p:spPr>
           <a:xfrm>
-            <a:off x="3931920" y="822960"/>
-            <a:ext cx="3840480" cy="914400"/>
+            <a:off x="4160520" y="822960"/>
+            <a:ext cx="3840480" cy="777240"/>
           </a:xfrm>
           <a:prstGeom prst="roundRect">
             <a:avLst>
-              <a:gd name="adj" fmla="val 6000"/>
+              <a:gd name="adj" fmla="val 5882"/>
             </a:avLst>
           </a:prstGeom>
           <a:solidFill>
-            <a:srgbClr val="1C2430"/>
+            <a:srgbClr val="F6F4F0"/>
           </a:solidFill>
-          <a:ln/>
+          <a:ln w="12700">
+            <a:solidFill>
+              <a:srgbClr val="E4DFD6"/>
+            </a:solidFill>
+            <a:prstDash val="solid"/>
+          </a:ln>
         </p:spPr>
       </p:sp>
       <p:sp>
@@ -4993,8 +5032,8 @@
         </p:nvSpPr>
         <p:spPr>
           <a:xfrm>
-            <a:off x="4114800" y="950976"/>
-            <a:ext cx="3474720" cy="329184"/>
+            <a:off x="4297680" y="932688"/>
+            <a:ext cx="3566160" cy="292608"/>
           </a:xfrm>
           <a:prstGeom prst="rect">
             <a:avLst/>
@@ -5010,9 +5049,9 @@
               <a:buNone/>
             </a:pPr>
             <a:r>
-              <a:rPr lang="en-US" sz="1600" dirty="0">
-                <a:solidFill>
-                  <a:srgbClr val="F4F1EA"/>
+              <a:rPr lang="en-US" sz="1500" dirty="0">
+                <a:solidFill>
+                  <a:srgbClr val="1C1C1C"/>
                 </a:solidFill>
                 <a:latin typeface="Calibri" pitchFamily="34" charset="0"/>
                 <a:ea typeface="Calibri" pitchFamily="34" charset="-122"/>
@@ -5020,7 +5059,7 @@
               </a:rPr>
               <a:t>Человек</a:t>
             </a:r>
-            <a:endParaRPr lang="en-US" sz="1600" dirty="0"/>
+            <a:endParaRPr lang="en-US" sz="1500" dirty="0"/>
           </a:p>
         </p:txBody>
       </p:sp>
@@ -5032,8 +5071,8 @@
         </p:nvSpPr>
         <p:spPr>
           <a:xfrm>
-            <a:off x="4114800" y="1280160"/>
-            <a:ext cx="3474720" cy="292608"/>
+            <a:off x="4297680" y="1225296"/>
+            <a:ext cx="3566160" cy="256032"/>
           </a:xfrm>
           <a:prstGeom prst="rect">
             <a:avLst/>
@@ -5049,9 +5088,9 @@
               <a:buNone/>
             </a:pPr>
             <a:r>
-              <a:rPr lang="en-US" sz="1300" dirty="0">
-                <a:solidFill>
-                  <a:srgbClr val="E8C39E"/>
+              <a:rPr lang="en-US" sz="1200" dirty="0">
+                <a:solidFill>
+                  <a:srgbClr val="5E6670"/>
                 </a:solidFill>
                 <a:latin typeface="Calibri" pitchFamily="34" charset="0"/>
                 <a:ea typeface="Calibri" pitchFamily="34" charset="-122"/>
@@ -5059,7 +5098,7 @@
               </a:rPr>
               <a:t>замысел и ответственность</a:t>
             </a:r>
-            <a:endParaRPr lang="en-US" sz="1300" dirty="0"/>
+            <a:endParaRPr lang="en-US" sz="1200" dirty="0"/>
           </a:p>
         </p:txBody>
       </p:sp>
@@ -5071,18 +5110,23 @@
         </p:nvSpPr>
         <p:spPr>
           <a:xfrm>
-            <a:off x="3931920" y="1965960"/>
-            <a:ext cx="3840480" cy="914400"/>
+            <a:off x="4160520" y="1874520"/>
+            <a:ext cx="3840480" cy="777240"/>
           </a:xfrm>
           <a:prstGeom prst="roundRect">
             <a:avLst>
-              <a:gd name="adj" fmla="val 6000"/>
+              <a:gd name="adj" fmla="val 5882"/>
             </a:avLst>
           </a:prstGeom>
           <a:solidFill>
-            <a:srgbClr val="1C2430"/>
+            <a:srgbClr val="F6F4F0"/>
           </a:solidFill>
-          <a:ln/>
+          <a:ln w="12700">
+            <a:solidFill>
+              <a:srgbClr val="E4DFD6"/>
+            </a:solidFill>
+            <a:prstDash val="solid"/>
+          </a:ln>
         </p:spPr>
       </p:sp>
       <p:sp>
@@ -5093,8 +5137,8 @@
         </p:nvSpPr>
         <p:spPr>
           <a:xfrm>
-            <a:off x="4114800" y="2093976"/>
-            <a:ext cx="3474720" cy="329184"/>
+            <a:off x="4297680" y="1984248"/>
+            <a:ext cx="3566160" cy="292608"/>
           </a:xfrm>
           <a:prstGeom prst="rect">
             <a:avLst/>
@@ -5110,9 +5154,9 @@
               <a:buNone/>
             </a:pPr>
             <a:r>
-              <a:rPr lang="en-US" sz="1600" dirty="0">
-                <a:solidFill>
-                  <a:srgbClr val="F4F1EA"/>
+              <a:rPr lang="en-US" sz="1500" dirty="0">
+                <a:solidFill>
+                  <a:srgbClr val="1C1C1C"/>
                 </a:solidFill>
                 <a:latin typeface="Calibri" pitchFamily="34" charset="0"/>
                 <a:ea typeface="Calibri" pitchFamily="34" charset="-122"/>
@@ -5120,7 +5164,7 @@
               </a:rPr>
               <a:t>Карточка поручения</a:t>
             </a:r>
-            <a:endParaRPr lang="en-US" sz="1600" dirty="0"/>
+            <a:endParaRPr lang="en-US" sz="1500" dirty="0"/>
           </a:p>
         </p:txBody>
       </p:sp>
@@ -5132,8 +5176,8 @@
         </p:nvSpPr>
         <p:spPr>
           <a:xfrm>
-            <a:off x="4114800" y="2423160"/>
-            <a:ext cx="3474720" cy="292608"/>
+            <a:off x="4297680" y="2276856"/>
+            <a:ext cx="3566160" cy="256032"/>
           </a:xfrm>
           <a:prstGeom prst="rect">
             <a:avLst/>
@@ -5149,9 +5193,9 @@
               <a:buNone/>
             </a:pPr>
             <a:r>
-              <a:rPr lang="en-US" sz="1300" dirty="0">
-                <a:solidFill>
-                  <a:srgbClr val="8EB6D9"/>
+              <a:rPr lang="en-US" sz="1200" dirty="0">
+                <a:solidFill>
+                  <a:srgbClr val="5E6670"/>
                 </a:solidFill>
                 <a:latin typeface="Calibri" pitchFamily="34" charset="0"/>
                 <a:ea typeface="Calibri" pitchFamily="34" charset="-122"/>
@@ -5159,7 +5203,7 @@
               </a:rPr>
               <a:t>цель, край, стоп, инструменты</a:t>
             </a:r>
-            <a:endParaRPr lang="en-US" sz="1300" dirty="0"/>
+            <a:endParaRPr lang="en-US" sz="1200" dirty="0"/>
           </a:p>
         </p:txBody>
       </p:sp>
@@ -5171,18 +5215,23 @@
         </p:nvSpPr>
         <p:spPr>
           <a:xfrm>
-            <a:off x="640080" y="3246120"/>
-            <a:ext cx="3840480" cy="914400"/>
+            <a:off x="640080" y="3017520"/>
+            <a:ext cx="3383280" cy="777240"/>
           </a:xfrm>
           <a:prstGeom prst="roundRect">
             <a:avLst>
-              <a:gd name="adj" fmla="val 6000"/>
+              <a:gd name="adj" fmla="val 5882"/>
             </a:avLst>
           </a:prstGeom>
           <a:solidFill>
-            <a:srgbClr val="1C2430"/>
+            <a:srgbClr val="F6F4F0"/>
           </a:solidFill>
-          <a:ln/>
+          <a:ln w="12700">
+            <a:solidFill>
+              <a:srgbClr val="E4DFD6"/>
+            </a:solidFill>
+            <a:prstDash val="solid"/>
+          </a:ln>
         </p:spPr>
       </p:sp>
       <p:sp>
@@ -5193,8 +5242,8 @@
         </p:nvSpPr>
         <p:spPr>
           <a:xfrm>
-            <a:off x="822960" y="3374136"/>
-            <a:ext cx="3474720" cy="329184"/>
+            <a:off x="777240" y="3127248"/>
+            <a:ext cx="3108960" cy="292608"/>
           </a:xfrm>
           <a:prstGeom prst="rect">
             <a:avLst/>
@@ -5210,9 +5259,9 @@
               <a:buNone/>
             </a:pPr>
             <a:r>
-              <a:rPr lang="en-US" sz="1600" dirty="0">
-                <a:solidFill>
-                  <a:srgbClr val="F4F1EA"/>
+              <a:rPr lang="en-US" sz="1500" dirty="0">
+                <a:solidFill>
+                  <a:srgbClr val="1C1C1C"/>
                 </a:solidFill>
                 <a:latin typeface="Calibri" pitchFamily="34" charset="0"/>
                 <a:ea typeface="Calibri" pitchFamily="34" charset="-122"/>
@@ -5220,7 +5269,7 @@
               </a:rPr>
               <a:t>Исполнитель</a:t>
             </a:r>
-            <a:endParaRPr lang="en-US" sz="1600" dirty="0"/>
+            <a:endParaRPr lang="en-US" sz="1500" dirty="0"/>
           </a:p>
         </p:txBody>
       </p:sp>
@@ -5232,8 +5281,8 @@
         </p:nvSpPr>
         <p:spPr>
           <a:xfrm>
-            <a:off x="822960" y="3703320"/>
-            <a:ext cx="3474720" cy="292608"/>
+            <a:off x="777240" y="3419856"/>
+            <a:ext cx="3108960" cy="256032"/>
           </a:xfrm>
           <a:prstGeom prst="rect">
             <a:avLst/>
@@ -5249,9 +5298,9 @@
               <a:buNone/>
             </a:pPr>
             <a:r>
-              <a:rPr lang="en-US" sz="1300" dirty="0">
-                <a:solidFill>
-                  <a:srgbClr val="D7DBE3"/>
+              <a:rPr lang="en-US" sz="1200" dirty="0">
+                <a:solidFill>
+                  <a:srgbClr val="5E6670"/>
                 </a:solidFill>
                 <a:latin typeface="Calibri" pitchFamily="34" charset="0"/>
                 <a:ea typeface="Calibri" pitchFamily="34" charset="-122"/>
@@ -5259,7 +5308,7 @@
               </a:rPr>
               <a:t>соразмерное задаче</a:t>
             </a:r>
-            <a:endParaRPr lang="en-US" sz="1300" dirty="0"/>
+            <a:endParaRPr lang="en-US" sz="1200" dirty="0"/>
           </a:p>
         </p:txBody>
       </p:sp>
@@ -5271,18 +5320,23 @@
         </p:nvSpPr>
         <p:spPr>
           <a:xfrm>
-            <a:off x="7589520" y="3246120"/>
-            <a:ext cx="3840480" cy="914400"/>
+            <a:off x="8138160" y="3017520"/>
+            <a:ext cx="3383280" cy="777240"/>
           </a:xfrm>
           <a:prstGeom prst="roundRect">
             <a:avLst>
-              <a:gd name="adj" fmla="val 6000"/>
+              <a:gd name="adj" fmla="val 5882"/>
             </a:avLst>
           </a:prstGeom>
           <a:solidFill>
-            <a:srgbClr val="1C2430"/>
+            <a:srgbClr val="F6F4F0"/>
           </a:solidFill>
-          <a:ln/>
+          <a:ln w="12700">
+            <a:solidFill>
+              <a:srgbClr val="E4DFD6"/>
+            </a:solidFill>
+            <a:prstDash val="solid"/>
+          </a:ln>
         </p:spPr>
       </p:sp>
       <p:sp>
@@ -5293,8 +5347,8 @@
         </p:nvSpPr>
         <p:spPr>
           <a:xfrm>
-            <a:off x="7772400" y="3374136"/>
-            <a:ext cx="3474720" cy="329184"/>
+            <a:off x="8275320" y="3127248"/>
+            <a:ext cx="3108960" cy="292608"/>
           </a:xfrm>
           <a:prstGeom prst="rect">
             <a:avLst/>
@@ -5310,9 +5364,9 @@
               <a:buNone/>
             </a:pPr>
             <a:r>
-              <a:rPr lang="en-US" sz="1600" dirty="0">
-                <a:solidFill>
-                  <a:srgbClr val="F4F1EA"/>
+              <a:rPr lang="en-US" sz="1500" dirty="0">
+                <a:solidFill>
+                  <a:srgbClr val="1C1C1C"/>
                 </a:solidFill>
                 <a:latin typeface="Calibri" pitchFamily="34" charset="0"/>
                 <a:ea typeface="Calibri" pitchFamily="34" charset="-122"/>
@@ -5320,7 +5374,7 @@
               </a:rPr>
               <a:t>Критик</a:t>
             </a:r>
-            <a:endParaRPr lang="en-US" sz="1600" dirty="0"/>
+            <a:endParaRPr lang="en-US" sz="1500" dirty="0"/>
           </a:p>
         </p:txBody>
       </p:sp>
@@ -5332,8 +5386,8 @@
         </p:nvSpPr>
         <p:spPr>
           <a:xfrm>
-            <a:off x="7772400" y="3703320"/>
-            <a:ext cx="3474720" cy="292608"/>
+            <a:off x="8275320" y="3419856"/>
+            <a:ext cx="3108960" cy="256032"/>
           </a:xfrm>
           <a:prstGeom prst="rect">
             <a:avLst/>
@@ -5349,17 +5403,17 @@
               <a:buNone/>
             </a:pPr>
             <a:r>
-              <a:rPr lang="en-US" sz="1300" dirty="0">
-                <a:solidFill>
-                  <a:srgbClr val="D7DBE3"/>
-                </a:solidFill>
-                <a:latin typeface="Calibri" pitchFamily="34" charset="0"/>
-                <a:ea typeface="Calibri" pitchFamily="34" charset="-122"/>
-                <a:cs typeface="Calibri" pitchFamily="34" charset="-120"/>
-              </a:rPr>
-              <a:t>не каждый шаг человеку</a:t>
-            </a:r>
-            <a:endParaRPr lang="en-US" sz="1300" dirty="0"/>
+              <a:rPr lang="en-US" sz="1200" dirty="0">
+                <a:solidFill>
+                  <a:srgbClr val="5E6670"/>
+                </a:solidFill>
+                <a:latin typeface="Calibri" pitchFamily="34" charset="0"/>
+                <a:ea typeface="Calibri" pitchFamily="34" charset="-122"/>
+                <a:cs typeface="Calibri" pitchFamily="34" charset="-120"/>
+              </a:rPr>
+              <a:t>человек не читает каждый шаг</a:t>
+            </a:r>
+            <a:endParaRPr lang="en-US" sz="1200" dirty="0"/>
           </a:p>
         </p:txBody>
       </p:sp>
@@ -5371,18 +5425,23 @@
         </p:nvSpPr>
         <p:spPr>
           <a:xfrm>
-            <a:off x="640080" y="4572000"/>
-            <a:ext cx="10881360" cy="1554480"/>
+            <a:off x="640080" y="4160520"/>
+            <a:ext cx="10881360" cy="1874520"/>
           </a:xfrm>
           <a:prstGeom prst="roundRect">
             <a:avLst>
-              <a:gd name="adj" fmla="val 3529"/>
+              <a:gd name="adj" fmla="val 2439"/>
             </a:avLst>
           </a:prstGeom>
           <a:solidFill>
-            <a:srgbClr val="181E28"/>
+            <a:srgbClr val="FFFFFF"/>
           </a:solidFill>
-          <a:ln/>
+          <a:ln w="12700">
+            <a:solidFill>
+              <a:srgbClr val="E4DFD6"/>
+            </a:solidFill>
+            <a:prstDash val="solid"/>
+          </a:ln>
         </p:spPr>
       </p:sp>
       <p:sp>
@@ -5393,73 +5452,349 @@
         </p:nvSpPr>
         <p:spPr>
           <a:xfrm>
-            <a:off x="868680" y="4800600"/>
-            <a:ext cx="10424160" cy="640080"/>
-          </a:xfrm>
-          <a:prstGeom prst="rect">
-            <a:avLst/>
-          </a:prstGeom>
-          <a:noFill/>
-          <a:ln/>
-        </p:spPr>
-        <p:txBody>
-          <a:bodyPr wrap="square" lIns="0" tIns="0" rIns="0" bIns="0" rtlCol="0" anchor="ctr"/>
-          <a:lstStyle/>
-          <a:p>
-            <a:pPr indent="0" marL="0">
-              <a:buNone/>
-            </a:pPr>
-            <a:r>
-              <a:rPr lang="en-US" sz="1600" dirty="0">
-                <a:solidFill>
-                  <a:srgbClr val="F4F1EA"/>
-                </a:solidFill>
-                <a:latin typeface="Calibri" pitchFamily="34" charset="0"/>
-                <a:ea typeface="Calibri" pitchFamily="34" charset="-122"/>
-                <a:cs typeface="Calibri" pitchFamily="34" charset="-120"/>
-              </a:rPr>
-              <a:t>Петля в песочнице: ИИ-1 строит цель  →  ИИ-2 атакует  →  ИИ-3 учится ловить  →  человек обновляет карточку</a:t>
-            </a:r>
-            <a:endParaRPr lang="en-US" sz="1600" dirty="0"/>
-          </a:p>
-        </p:txBody>
-      </p:sp>
-      <p:sp>
-        <p:nvSpPr>
-          <p:cNvPr id="20" name="Text 18"/>
-          <p:cNvSpPr/>
-          <p:nvPr/>
-        </p:nvSpPr>
-        <p:spPr>
-          <a:xfrm>
-            <a:off x="868680" y="5440680"/>
-            <a:ext cx="10424160" cy="365760"/>
-          </a:xfrm>
-          <a:prstGeom prst="rect">
-            <a:avLst/>
-          </a:prstGeom>
-          <a:noFill/>
-          <a:ln/>
-        </p:spPr>
-        <p:txBody>
-          <a:bodyPr wrap="square" lIns="0" tIns="0" rIns="0" bIns="0" rtlCol="0" anchor="ctr"/>
-          <a:lstStyle/>
-          <a:p>
-            <a:pPr indent="0" marL="0">
-              <a:buNone/>
-            </a:pPr>
-            <a:r>
-              <a:rPr lang="en-US" sz="1400" dirty="0">
-                <a:solidFill>
-                  <a:srgbClr val="E8C39E"/>
-                </a:solidFill>
-                <a:latin typeface="Calibri" pitchFamily="34" charset="0"/>
-                <a:ea typeface="Calibri" pitchFamily="34" charset="-122"/>
-                <a:cs typeface="Calibri" pitchFamily="34" charset="-120"/>
-              </a:rPr>
-              <a:t>Это тренировка. Блока «гарантия» на схеме нет.</a:t>
-            </a:r>
-            <a:endParaRPr lang="en-US" sz="1400" dirty="0"/>
+            <a:off x="822960" y="4297680"/>
+            <a:ext cx="10515600" cy="274320"/>
+          </a:xfrm>
+          <a:prstGeom prst="rect">
+            <a:avLst/>
+          </a:prstGeom>
+          <a:noFill/>
+          <a:ln/>
+        </p:spPr>
+        <p:txBody>
+          <a:bodyPr wrap="square" lIns="0" tIns="0" rIns="0" bIns="0" rtlCol="0" anchor="ctr"/>
+          <a:lstStyle/>
+          <a:p>
+            <a:pPr indent="0" marL="0">
+              <a:buNone/>
+            </a:pPr>
+            <a:r>
+              <a:rPr lang="en-US" sz="1300" dirty="0">
+                <a:solidFill>
+                  <a:srgbClr val="1F4B6E"/>
+                </a:solidFill>
+                <a:latin typeface="Calibri" pitchFamily="34" charset="0"/>
+                <a:ea typeface="Calibri" pitchFamily="34" charset="-122"/>
+                <a:cs typeface="Calibri" pitchFamily="34" charset="-120"/>
+              </a:rPr>
+              <a:t>Петля только в песочнице</a:t>
+            </a:r>
+            <a:endParaRPr lang="en-US" sz="1300" dirty="0"/>
+          </a:p>
+        </p:txBody>
+      </p:sp>
+      <p:sp>
+        <p:nvSpPr>
+          <p:cNvPr id="20" name="Shape 18"/>
+          <p:cNvSpPr/>
+          <p:nvPr/>
+        </p:nvSpPr>
+        <p:spPr>
+          <a:xfrm>
+            <a:off x="868680" y="4709160"/>
+            <a:ext cx="3200400" cy="777240"/>
+          </a:xfrm>
+          <a:prstGeom prst="roundRect">
+            <a:avLst>
+              <a:gd name="adj" fmla="val 5882"/>
+            </a:avLst>
+          </a:prstGeom>
+          <a:solidFill>
+            <a:srgbClr val="F6F4F0"/>
+          </a:solidFill>
+          <a:ln w="12700">
+            <a:solidFill>
+              <a:srgbClr val="E4DFD6"/>
+            </a:solidFill>
+            <a:prstDash val="solid"/>
+          </a:ln>
+        </p:spPr>
+      </p:sp>
+      <p:sp>
+        <p:nvSpPr>
+          <p:cNvPr id="21" name="Text 19"/>
+          <p:cNvSpPr/>
+          <p:nvPr/>
+        </p:nvSpPr>
+        <p:spPr>
+          <a:xfrm>
+            <a:off x="1005840" y="4818888"/>
+            <a:ext cx="2926080" cy="292608"/>
+          </a:xfrm>
+          <a:prstGeom prst="rect">
+            <a:avLst/>
+          </a:prstGeom>
+          <a:noFill/>
+          <a:ln/>
+        </p:spPr>
+        <p:txBody>
+          <a:bodyPr wrap="square" lIns="0" tIns="0" rIns="0" bIns="0" rtlCol="0" anchor="ctr"/>
+          <a:lstStyle/>
+          <a:p>
+            <a:pPr algn="ctr" indent="0" marL="0">
+              <a:buNone/>
+            </a:pPr>
+            <a:r>
+              <a:rPr lang="en-US" sz="1500" dirty="0">
+                <a:solidFill>
+                  <a:srgbClr val="1C1C1C"/>
+                </a:solidFill>
+                <a:latin typeface="Calibri" pitchFamily="34" charset="0"/>
+                <a:ea typeface="Calibri" pitchFamily="34" charset="-122"/>
+                <a:cs typeface="Calibri" pitchFamily="34" charset="-120"/>
+              </a:rPr>
+              <a:t>ИИ-1 строит цель</a:t>
+            </a:r>
+            <a:endParaRPr lang="en-US" sz="1500" dirty="0"/>
+          </a:p>
+        </p:txBody>
+      </p:sp>
+      <p:sp>
+        <p:nvSpPr>
+          <p:cNvPr id="22" name="Text 20"/>
+          <p:cNvSpPr/>
+          <p:nvPr/>
+        </p:nvSpPr>
+        <p:spPr>
+          <a:xfrm>
+            <a:off x="1005840" y="5111496"/>
+            <a:ext cx="2926080" cy="256032"/>
+          </a:xfrm>
+          <a:prstGeom prst="rect">
+            <a:avLst/>
+          </a:prstGeom>
+          <a:noFill/>
+          <a:ln/>
+        </p:spPr>
+        <p:txBody>
+          <a:bodyPr wrap="square" lIns="0" tIns="0" rIns="0" bIns="0" rtlCol="0" anchor="ctr"/>
+          <a:lstStyle/>
+          <a:p>
+            <a:pPr algn="ctr" indent="0" marL="0">
+              <a:buNone/>
+            </a:pPr>
+            <a:r>
+              <a:rPr lang="en-US" sz="1200" dirty="0">
+                <a:solidFill>
+                  <a:srgbClr val="5E6670"/>
+                </a:solidFill>
+                <a:latin typeface="Calibri" pitchFamily="34" charset="0"/>
+                <a:ea typeface="Calibri" pitchFamily="34" charset="-122"/>
+                <a:cs typeface="Calibri" pitchFamily="34" charset="-120"/>
+              </a:rPr>
+              <a:t>пример: виртуальный банк</a:t>
+            </a:r>
+            <a:endParaRPr lang="en-US" sz="1200" dirty="0"/>
+          </a:p>
+        </p:txBody>
+      </p:sp>
+      <p:sp>
+        <p:nvSpPr>
+          <p:cNvPr id="23" name="Shape 21"/>
+          <p:cNvSpPr/>
+          <p:nvPr/>
+        </p:nvSpPr>
+        <p:spPr>
+          <a:xfrm>
+            <a:off x="4480560" y="4709160"/>
+            <a:ext cx="3200400" cy="777240"/>
+          </a:xfrm>
+          <a:prstGeom prst="roundRect">
+            <a:avLst>
+              <a:gd name="adj" fmla="val 5882"/>
+            </a:avLst>
+          </a:prstGeom>
+          <a:solidFill>
+            <a:srgbClr val="F6F4F0"/>
+          </a:solidFill>
+          <a:ln w="12700">
+            <a:solidFill>
+              <a:srgbClr val="E4DFD6"/>
+            </a:solidFill>
+            <a:prstDash val="solid"/>
+          </a:ln>
+        </p:spPr>
+      </p:sp>
+      <p:sp>
+        <p:nvSpPr>
+          <p:cNvPr id="24" name="Text 22"/>
+          <p:cNvSpPr/>
+          <p:nvPr/>
+        </p:nvSpPr>
+        <p:spPr>
+          <a:xfrm>
+            <a:off x="4617720" y="4818888"/>
+            <a:ext cx="2926080" cy="292608"/>
+          </a:xfrm>
+          <a:prstGeom prst="rect">
+            <a:avLst/>
+          </a:prstGeom>
+          <a:noFill/>
+          <a:ln/>
+        </p:spPr>
+        <p:txBody>
+          <a:bodyPr wrap="square" lIns="0" tIns="0" rIns="0" bIns="0" rtlCol="0" anchor="ctr"/>
+          <a:lstStyle/>
+          <a:p>
+            <a:pPr algn="ctr" indent="0" marL="0">
+              <a:buNone/>
+            </a:pPr>
+            <a:r>
+              <a:rPr lang="en-US" sz="1500" dirty="0">
+                <a:solidFill>
+                  <a:srgbClr val="1C1C1C"/>
+                </a:solidFill>
+                <a:latin typeface="Calibri" pitchFamily="34" charset="0"/>
+                <a:ea typeface="Calibri" pitchFamily="34" charset="-122"/>
+                <a:cs typeface="Calibri" pitchFamily="34" charset="-120"/>
+              </a:rPr>
+              <a:t>ИИ-2 атакует</a:t>
+            </a:r>
+            <a:endParaRPr lang="en-US" sz="1500" dirty="0"/>
+          </a:p>
+        </p:txBody>
+      </p:sp>
+      <p:sp>
+        <p:nvSpPr>
+          <p:cNvPr id="25" name="Text 23"/>
+          <p:cNvSpPr/>
+          <p:nvPr/>
+        </p:nvSpPr>
+        <p:spPr>
+          <a:xfrm>
+            <a:off x="4617720" y="5111496"/>
+            <a:ext cx="2926080" cy="256032"/>
+          </a:xfrm>
+          <a:prstGeom prst="rect">
+            <a:avLst/>
+          </a:prstGeom>
+          <a:noFill/>
+          <a:ln/>
+        </p:spPr>
+        <p:txBody>
+          <a:bodyPr wrap="square" lIns="0" tIns="0" rIns="0" bIns="0" rtlCol="0" anchor="ctr"/>
+          <a:lstStyle/>
+          <a:p>
+            <a:pPr algn="ctr" indent="0" marL="0">
+              <a:buNone/>
+            </a:pPr>
+            <a:r>
+              <a:rPr lang="en-US" sz="1200" dirty="0">
+                <a:solidFill>
+                  <a:srgbClr val="5E6670"/>
+                </a:solidFill>
+                <a:latin typeface="Calibri" pitchFamily="34" charset="0"/>
+                <a:ea typeface="Calibri" pitchFamily="34" charset="-122"/>
+                <a:cs typeface="Calibri" pitchFamily="34" charset="-120"/>
+              </a:rPr>
+              <a:t>ищет выход за край</a:t>
+            </a:r>
+            <a:endParaRPr lang="en-US" sz="1200" dirty="0"/>
+          </a:p>
+        </p:txBody>
+      </p:sp>
+      <p:sp>
+        <p:nvSpPr>
+          <p:cNvPr id="26" name="Shape 24"/>
+          <p:cNvSpPr/>
+          <p:nvPr/>
+        </p:nvSpPr>
+        <p:spPr>
+          <a:xfrm>
+            <a:off x="8092440" y="4709160"/>
+            <a:ext cx="3200400" cy="777240"/>
+          </a:xfrm>
+          <a:prstGeom prst="roundRect">
+            <a:avLst>
+              <a:gd name="adj" fmla="val 5882"/>
+            </a:avLst>
+          </a:prstGeom>
+          <a:solidFill>
+            <a:srgbClr val="F6F4F0"/>
+          </a:solidFill>
+          <a:ln w="12700">
+            <a:solidFill>
+              <a:srgbClr val="E4DFD6"/>
+            </a:solidFill>
+            <a:prstDash val="solid"/>
+          </a:ln>
+        </p:spPr>
+      </p:sp>
+      <p:sp>
+        <p:nvSpPr>
+          <p:cNvPr id="27" name="Text 25"/>
+          <p:cNvSpPr/>
+          <p:nvPr/>
+        </p:nvSpPr>
+        <p:spPr>
+          <a:xfrm>
+            <a:off x="8229600" y="4818888"/>
+            <a:ext cx="2926080" cy="292608"/>
+          </a:xfrm>
+          <a:prstGeom prst="rect">
+            <a:avLst/>
+          </a:prstGeom>
+          <a:noFill/>
+          <a:ln/>
+        </p:spPr>
+        <p:txBody>
+          <a:bodyPr wrap="square" lIns="0" tIns="0" rIns="0" bIns="0" rtlCol="0" anchor="ctr"/>
+          <a:lstStyle/>
+          <a:p>
+            <a:pPr algn="ctr" indent="0" marL="0">
+              <a:buNone/>
+            </a:pPr>
+            <a:r>
+              <a:rPr lang="en-US" sz="1500" dirty="0">
+                <a:solidFill>
+                  <a:srgbClr val="1C1C1C"/>
+                </a:solidFill>
+                <a:latin typeface="Calibri" pitchFamily="34" charset="0"/>
+                <a:ea typeface="Calibri" pitchFamily="34" charset="-122"/>
+                <a:cs typeface="Calibri" pitchFamily="34" charset="-120"/>
+              </a:rPr>
+              <a:t>ИИ-3 ловит атаку</a:t>
+            </a:r>
+            <a:endParaRPr lang="en-US" sz="1500" dirty="0"/>
+          </a:p>
+        </p:txBody>
+      </p:sp>
+      <p:sp>
+        <p:nvSpPr>
+          <p:cNvPr id="28" name="Text 26"/>
+          <p:cNvSpPr/>
+          <p:nvPr/>
+        </p:nvSpPr>
+        <p:spPr>
+          <a:xfrm>
+            <a:off x="8229600" y="5111496"/>
+            <a:ext cx="2926080" cy="256032"/>
+          </a:xfrm>
+          <a:prstGeom prst="rect">
+            <a:avLst/>
+          </a:prstGeom>
+          <a:noFill/>
+          <a:ln/>
+        </p:spPr>
+        <p:txBody>
+          <a:bodyPr wrap="square" lIns="0" tIns="0" rIns="0" bIns="0" rtlCol="0" anchor="ctr"/>
+          <a:lstStyle/>
+          <a:p>
+            <a:pPr algn="ctr" indent="0" marL="0">
+              <a:buNone/>
+            </a:pPr>
+            <a:r>
+              <a:rPr lang="en-US" sz="1200" dirty="0">
+                <a:solidFill>
+                  <a:srgbClr val="5E6670"/>
+                </a:solidFill>
+                <a:latin typeface="Calibri" pitchFamily="34" charset="0"/>
+                <a:ea typeface="Calibri" pitchFamily="34" charset="-122"/>
+                <a:cs typeface="Calibri" pitchFamily="34" charset="-120"/>
+              </a:rPr>
+              <a:t>правила обновляет человек</a:t>
+            </a:r>
+            <a:endParaRPr lang="en-US" sz="1200" dirty="0"/>
           </a:p>
         </p:txBody>
       </p:sp>
@@ -5477,7 +5812,7 @@
     <p:bg>
       <p:bgPr>
         <a:solidFill>
-          <a:srgbClr val="12151C"/>
+          <a:srgbClr val="FFFFFF"/>
         </a:solidFill>
       </p:bgPr>
     </p:bg>
@@ -5503,14 +5838,14 @@
         </p:nvSpPr>
         <p:spPr>
           <a:xfrm>
-            <a:off x="0" y="0"/>
-            <a:ext cx="109728" cy="6858000"/>
+            <a:off x="502920" y="6446520"/>
+            <a:ext cx="11155680" cy="9144"/>
           </a:xfrm>
           <a:prstGeom prst="rect">
             <a:avLst/>
           </a:prstGeom>
           <a:solidFill>
-            <a:srgbClr val="E8C39E"/>
+            <a:srgbClr val="D9D4CC"/>
           </a:solidFill>
           <a:ln/>
         </p:spPr>
@@ -5523,34 +5858,34 @@
         </p:nvSpPr>
         <p:spPr>
           <a:xfrm>
-            <a:off x="411480" y="6510528"/>
-            <a:ext cx="7315200" cy="219456"/>
-          </a:xfrm>
-          <a:prstGeom prst="rect">
-            <a:avLst/>
-          </a:prstGeom>
-          <a:noFill/>
-          <a:ln/>
-        </p:spPr>
-        <p:txBody>
-          <a:bodyPr wrap="square" lIns="0" tIns="0" rIns="0" bIns="0" rtlCol="0" anchor="ctr"/>
-          <a:lstStyle/>
-          <a:p>
-            <a:pPr indent="0" marL="0">
-              <a:buNone/>
-            </a:pPr>
-            <a:r>
-              <a:rPr lang="en-US" sz="1100" dirty="0">
-                <a:solidFill>
-                  <a:srgbClr val="9AA3B2"/>
-                </a:solidFill>
-                <a:latin typeface="Calibri" pitchFamily="34" charset="0"/>
-                <a:ea typeface="Calibri" pitchFamily="34" charset="-122"/>
-                <a:cs typeface="Calibri" pitchFamily="34" charset="-120"/>
-              </a:rPr>
-              <a:t>t.me/yury/1300  ·  7 октября 2026</a:t>
-            </a:r>
-            <a:endParaRPr lang="en-US" sz="1100" dirty="0"/>
+            <a:off x="502920" y="6510528"/>
+            <a:ext cx="5486400" cy="219456"/>
+          </a:xfrm>
+          <a:prstGeom prst="rect">
+            <a:avLst/>
+          </a:prstGeom>
+          <a:noFill/>
+          <a:ln/>
+        </p:spPr>
+        <p:txBody>
+          <a:bodyPr wrap="square" lIns="0" tIns="0" rIns="0" bIns="0" rtlCol="0" anchor="ctr"/>
+          <a:lstStyle/>
+          <a:p>
+            <a:pPr indent="0" marL="0">
+              <a:buNone/>
+            </a:pPr>
+            <a:r>
+              <a:rPr lang="en-US" sz="1200" dirty="0">
+                <a:solidFill>
+                  <a:srgbClr val="5E6670"/>
+                </a:solidFill>
+                <a:latin typeface="Calibri" pitchFamily="34" charset="0"/>
+                <a:ea typeface="Calibri" pitchFamily="34" charset="-122"/>
+                <a:cs typeface="Calibri" pitchFamily="34" charset="-120"/>
+              </a:rPr>
+              <a:t>t.me/yury/1300</a:t>
+            </a:r>
+            <a:endParaRPr lang="en-US" sz="1200" dirty="0"/>
           </a:p>
         </p:txBody>
       </p:sp>
@@ -5562,8 +5897,8 @@
         </p:nvSpPr>
         <p:spPr>
           <a:xfrm>
-            <a:off x="10424160" y="6510528"/>
-            <a:ext cx="1280160" cy="219456"/>
+            <a:off x="9418320" y="6510528"/>
+            <a:ext cx="2240280" cy="219456"/>
           </a:xfrm>
           <a:prstGeom prst="rect">
             <a:avLst/>
@@ -5579,9 +5914,9 @@
               <a:buNone/>
             </a:pPr>
             <a:r>
-              <a:rPr lang="en-US" sz="1100" dirty="0">
-                <a:solidFill>
-                  <a:srgbClr val="9AA3B2"/>
+              <a:rPr lang="en-US" sz="1200" dirty="0">
+                <a:solidFill>
+                  <a:srgbClr val="5E6670"/>
                 </a:solidFill>
                 <a:latin typeface="Calibri" pitchFamily="34" charset="0"/>
                 <a:ea typeface="Calibri" pitchFamily="34" charset="-122"/>
@@ -5589,7 +5924,7 @@
               </a:rPr>
               <a:t>8 / 10</a:t>
             </a:r>
-            <a:endParaRPr lang="en-US" sz="1100" dirty="0"/>
+            <a:endParaRPr lang="en-US" sz="1200" dirty="0"/>
           </a:p>
         </p:txBody>
       </p:sp>
@@ -5601,8 +5936,8 @@
         </p:nvSpPr>
         <p:spPr>
           <a:xfrm>
-            <a:off x="457200" y="292608"/>
-            <a:ext cx="10972800" cy="384048"/>
+            <a:off x="640080" y="365760"/>
+            <a:ext cx="10972800" cy="411480"/>
           </a:xfrm>
           <a:prstGeom prst="rect">
             <a:avLst/>
@@ -5620,7 +5955,7 @@
             <a:r>
               <a:rPr lang="en-US" sz="2800" dirty="0">
                 <a:solidFill>
-                  <a:srgbClr val="F4F1EA"/>
+                  <a:srgbClr val="1C1C1C"/>
                 </a:solidFill>
                 <a:latin typeface="Georgia" pitchFamily="34" charset="0"/>
                 <a:ea typeface="Georgia" pitchFamily="34" charset="-122"/>
@@ -5640,8 +5975,8 @@
         </p:nvSpPr>
         <p:spPr>
           <a:xfrm>
-            <a:off x="457200" y="1051560"/>
-            <a:ext cx="11155680" cy="1920240"/>
+            <a:off x="640080" y="1143000"/>
+            <a:ext cx="10972800" cy="1828800"/>
           </a:xfrm>
           <a:prstGeom prst="rect">
             <a:avLst/>
@@ -5659,7 +5994,7 @@
             <a:r>
               <a:rPr lang="en-US" sz="2000" dirty="0">
                 <a:solidFill>
-                  <a:srgbClr val="F4F1EA"/>
+                  <a:srgbClr val="1C1C1C"/>
                 </a:solidFill>
                 <a:latin typeface="Calibri" pitchFamily="34" charset="0"/>
                 <a:ea typeface="Calibri" pitchFamily="34" charset="-122"/>
@@ -5676,13 +6011,13 @@
             <a:r>
               <a:rPr lang="en-US" sz="2000" dirty="0">
                 <a:solidFill>
-                  <a:srgbClr val="F4F1EA"/>
-                </a:solidFill>
-                <a:latin typeface="Calibri" pitchFamily="34" charset="0"/>
-                <a:ea typeface="Calibri" pitchFamily="34" charset="-122"/>
-                <a:cs typeface="Calibri" pitchFamily="34" charset="-120"/>
-              </a:rPr>
-              <a:t>Ему говорят задачу и края. Рядом сидит второй, который смотрит, не вышел ли первый за края.</a:t>
+                  <a:srgbClr val="1C1C1C"/>
+                </a:solidFill>
+                <a:latin typeface="Calibri" pitchFamily="34" charset="0"/>
+                <a:ea typeface="Calibri" pitchFamily="34" charset="-122"/>
+                <a:cs typeface="Calibri" pitchFamily="34" charset="-120"/>
+              </a:rPr>
+              <a:t>Ему говорят задачу и края. Второй смотрит, не вышел ли первый за края.</a:t>
             </a:r>
             <a:endParaRPr lang="en-US" sz="2000" dirty="0"/>
           </a:p>
@@ -5693,7 +6028,7 @@
             <a:r>
               <a:rPr lang="en-US" sz="2000" dirty="0">
                 <a:solidFill>
-                  <a:srgbClr val="F4F1EA"/>
+                  <a:srgbClr val="1C1C1C"/>
                 </a:solidFill>
                 <a:latin typeface="Calibri" pitchFamily="34" charset="0"/>
                 <a:ea typeface="Calibri" pitchFamily="34" charset="-122"/>
@@ -5713,16 +6048,16 @@
         </p:nvSpPr>
         <p:spPr>
           <a:xfrm>
-            <a:off x="457200" y="3291840"/>
-            <a:ext cx="11247120" cy="2103120"/>
+            <a:off x="640080" y="3291840"/>
+            <a:ext cx="10881360" cy="1965960"/>
           </a:xfrm>
           <a:prstGeom prst="roundRect">
             <a:avLst>
-              <a:gd name="adj" fmla="val 3478"/>
+              <a:gd name="adj" fmla="val 2791"/>
             </a:avLst>
           </a:prstGeom>
           <a:solidFill>
-            <a:srgbClr val="1C2430"/>
+            <a:srgbClr val="F6F4F0"/>
           </a:solidFill>
           <a:ln/>
         </p:spPr>
@@ -5735,8 +6070,8 @@
         </p:nvSpPr>
         <p:spPr>
           <a:xfrm>
-            <a:off x="731520" y="3520440"/>
-            <a:ext cx="10058400" cy="320040"/>
+            <a:off x="868680" y="3520440"/>
+            <a:ext cx="10424160" cy="292608"/>
           </a:xfrm>
           <a:prstGeom prst="rect">
             <a:avLst/>
@@ -5754,7 +6089,7 @@
             <a:r>
               <a:rPr lang="en-US" sz="1400" dirty="0">
                 <a:solidFill>
-                  <a:srgbClr val="E8C39E"/>
+                  <a:srgbClr val="1F4B6E"/>
                 </a:solidFill>
                 <a:latin typeface="Calibri" pitchFamily="34" charset="0"/>
                 <a:ea typeface="Calibri" pitchFamily="34" charset="-122"/>
@@ -5774,8 +6109,8 @@
         </p:nvSpPr>
         <p:spPr>
           <a:xfrm>
-            <a:off x="731520" y="3977640"/>
-            <a:ext cx="10607040" cy="1005840"/>
+            <a:off x="868680" y="3931920"/>
+            <a:ext cx="10424160" cy="1005840"/>
           </a:xfrm>
           <a:prstGeom prst="rect">
             <a:avLst/>
@@ -5793,7 +6128,7 @@
             <a:r>
               <a:rPr lang="en-US" sz="1800" dirty="0">
                 <a:solidFill>
-                  <a:srgbClr val="F4F1EA"/>
+                  <a:srgbClr val="1C1C1C"/>
                 </a:solidFill>
                 <a:latin typeface="Calibri" pitchFamily="34" charset="0"/>
                 <a:ea typeface="Calibri" pitchFamily="34" charset="-122"/>
@@ -5810,7 +6145,7 @@
             <a:r>
               <a:rPr lang="en-US" sz="1800" dirty="0">
                 <a:solidFill>
-                  <a:srgbClr val="F4F1EA"/>
+                  <a:srgbClr val="1C1C1C"/>
                 </a:solidFill>
                 <a:latin typeface="Calibri" pitchFamily="34" charset="0"/>
                 <a:ea typeface="Calibri" pitchFamily="34" charset="-122"/>
@@ -5836,7 +6171,7 @@
     <p:bg>
       <p:bgPr>
         <a:solidFill>
-          <a:srgbClr val="12151C"/>
+          <a:srgbClr val="FFFFFF"/>
         </a:solidFill>
       </p:bgPr>
     </p:bg>
@@ -5862,14 +6197,14 @@
         </p:nvSpPr>
         <p:spPr>
           <a:xfrm>
-            <a:off x="0" y="0"/>
-            <a:ext cx="109728" cy="6858000"/>
+            <a:off x="502920" y="6446520"/>
+            <a:ext cx="11155680" cy="9144"/>
           </a:xfrm>
           <a:prstGeom prst="rect">
             <a:avLst/>
           </a:prstGeom>
           <a:solidFill>
-            <a:srgbClr val="E8C39E"/>
+            <a:srgbClr val="D9D4CC"/>
           </a:solidFill>
           <a:ln/>
         </p:spPr>
@@ -5882,34 +6217,34 @@
         </p:nvSpPr>
         <p:spPr>
           <a:xfrm>
-            <a:off x="411480" y="6510528"/>
-            <a:ext cx="7315200" cy="219456"/>
-          </a:xfrm>
-          <a:prstGeom prst="rect">
-            <a:avLst/>
-          </a:prstGeom>
-          <a:noFill/>
-          <a:ln/>
-        </p:spPr>
-        <p:txBody>
-          <a:bodyPr wrap="square" lIns="0" tIns="0" rIns="0" bIns="0" rtlCol="0" anchor="ctr"/>
-          <a:lstStyle/>
-          <a:p>
-            <a:pPr indent="0" marL="0">
-              <a:buNone/>
-            </a:pPr>
-            <a:r>
-              <a:rPr lang="en-US" sz="1100" dirty="0">
-                <a:solidFill>
-                  <a:srgbClr val="9AA3B2"/>
-                </a:solidFill>
-                <a:latin typeface="Calibri" pitchFamily="34" charset="0"/>
-                <a:ea typeface="Calibri" pitchFamily="34" charset="-122"/>
-                <a:cs typeface="Calibri" pitchFamily="34" charset="-120"/>
-              </a:rPr>
-              <a:t>t.me/yury/1300  ·  7 октября 2026</a:t>
-            </a:r>
-            <a:endParaRPr lang="en-US" sz="1100" dirty="0"/>
+            <a:off x="502920" y="6510528"/>
+            <a:ext cx="5486400" cy="219456"/>
+          </a:xfrm>
+          <a:prstGeom prst="rect">
+            <a:avLst/>
+          </a:prstGeom>
+          <a:noFill/>
+          <a:ln/>
+        </p:spPr>
+        <p:txBody>
+          <a:bodyPr wrap="square" lIns="0" tIns="0" rIns="0" bIns="0" rtlCol="0" anchor="ctr"/>
+          <a:lstStyle/>
+          <a:p>
+            <a:pPr indent="0" marL="0">
+              <a:buNone/>
+            </a:pPr>
+            <a:r>
+              <a:rPr lang="en-US" sz="1200" dirty="0">
+                <a:solidFill>
+                  <a:srgbClr val="5E6670"/>
+                </a:solidFill>
+                <a:latin typeface="Calibri" pitchFamily="34" charset="0"/>
+                <a:ea typeface="Calibri" pitchFamily="34" charset="-122"/>
+                <a:cs typeface="Calibri" pitchFamily="34" charset="-120"/>
+              </a:rPr>
+              <a:t>t.me/yury/1300</a:t>
+            </a:r>
+            <a:endParaRPr lang="en-US" sz="1200" dirty="0"/>
           </a:p>
         </p:txBody>
       </p:sp>
@@ -5921,8 +6256,8 @@
         </p:nvSpPr>
         <p:spPr>
           <a:xfrm>
-            <a:off x="10424160" y="6510528"/>
-            <a:ext cx="1280160" cy="219456"/>
+            <a:off x="9418320" y="6510528"/>
+            <a:ext cx="2240280" cy="219456"/>
           </a:xfrm>
           <a:prstGeom prst="rect">
             <a:avLst/>
@@ -5938,9 +6273,9 @@
               <a:buNone/>
             </a:pPr>
             <a:r>
-              <a:rPr lang="en-US" sz="1100" dirty="0">
-                <a:solidFill>
-                  <a:srgbClr val="9AA3B2"/>
+              <a:rPr lang="en-US" sz="1200" dirty="0">
+                <a:solidFill>
+                  <a:srgbClr val="5E6670"/>
                 </a:solidFill>
                 <a:latin typeface="Calibri" pitchFamily="34" charset="0"/>
                 <a:ea typeface="Calibri" pitchFamily="34" charset="-122"/>
@@ -5948,7 +6283,7 @@
               </a:rPr>
               <a:t>9 / 10</a:t>
             </a:r>
-            <a:endParaRPr lang="en-US" sz="1100" dirty="0"/>
+            <a:endParaRPr lang="en-US" sz="1200" dirty="0"/>
           </a:p>
         </p:txBody>
       </p:sp>
@@ -5960,8 +6295,8 @@
         </p:nvSpPr>
         <p:spPr>
           <a:xfrm>
-            <a:off x="457200" y="292608"/>
-            <a:ext cx="10972800" cy="365760"/>
+            <a:off x="640080" y="347472"/>
+            <a:ext cx="10972800" cy="384048"/>
           </a:xfrm>
           <a:prstGeom prst="rect">
             <a:avLst/>
@@ -5979,7 +6314,7 @@
             <a:r>
               <a:rPr lang="en-US" sz="2800" dirty="0">
                 <a:solidFill>
-                  <a:srgbClr val="F4F1EA"/>
+                  <a:srgbClr val="1C1C1C"/>
                 </a:solidFill>
                 <a:latin typeface="Georgia" pitchFamily="34" charset="0"/>
                 <a:ea typeface="Georgia" pitchFamily="34" charset="-122"/>
@@ -5999,8 +6334,8 @@
         </p:nvSpPr>
         <p:spPr>
           <a:xfrm>
-            <a:off x="457200" y="914400"/>
-            <a:ext cx="457200" cy="365760"/>
+            <a:off x="640080" y="1005840"/>
+            <a:ext cx="411480" cy="365760"/>
           </a:xfrm>
           <a:prstGeom prst="rect">
             <a:avLst/>
@@ -6018,7 +6353,7 @@
             <a:r>
               <a:rPr lang="en-US" sz="1800" dirty="0">
                 <a:solidFill>
-                  <a:srgbClr val="E8C39E"/>
+                  <a:srgbClr val="1F4B6E"/>
                 </a:solidFill>
                 <a:latin typeface="Calibri" pitchFamily="34" charset="0"/>
                 <a:ea typeface="Calibri" pitchFamily="34" charset="-122"/>
@@ -6038,34 +6373,34 @@
         </p:nvSpPr>
         <p:spPr>
           <a:xfrm>
-            <a:off x="1051560" y="914400"/>
-            <a:ext cx="10424160" cy="548640"/>
-          </a:xfrm>
-          <a:prstGeom prst="rect">
-            <a:avLst/>
-          </a:prstGeom>
-          <a:noFill/>
-          <a:ln/>
-        </p:spPr>
-        <p:txBody>
-          <a:bodyPr wrap="square" lIns="0" tIns="0" rIns="0" bIns="0" rtlCol="0" anchor="ctr"/>
-          <a:lstStyle/>
-          <a:p>
-            <a:pPr indent="0" marL="0">
-              <a:buNone/>
-            </a:pPr>
-            <a:r>
-              <a:rPr lang="en-US" sz="1600" dirty="0">
-                <a:solidFill>
-                  <a:srgbClr val="F4F1EA"/>
-                </a:solidFill>
-                <a:latin typeface="Calibri" pitchFamily="34" charset="0"/>
-                <a:ea typeface="Calibri" pitchFamily="34" charset="-122"/>
-                <a:cs typeface="Calibri" pitchFamily="34" charset="-120"/>
-              </a:rPr>
-              <a:t>Разобрать агентов по вреду: необратимое наружу не отдавать без второго подтверждения.</a:t>
-            </a:r>
-            <a:endParaRPr lang="en-US" sz="1600" dirty="0"/>
+            <a:off x="1188720" y="1005840"/>
+            <a:ext cx="10241280" cy="457200"/>
+          </a:xfrm>
+          <a:prstGeom prst="rect">
+            <a:avLst/>
+          </a:prstGeom>
+          <a:noFill/>
+          <a:ln/>
+        </p:spPr>
+        <p:txBody>
+          <a:bodyPr wrap="square" lIns="0" tIns="0" rIns="0" bIns="0" rtlCol="0" anchor="ctr"/>
+          <a:lstStyle/>
+          <a:p>
+            <a:pPr indent="0" marL="0">
+              <a:buNone/>
+            </a:pPr>
+            <a:r>
+              <a:rPr lang="en-US" sz="1800" dirty="0">
+                <a:solidFill>
+                  <a:srgbClr val="1C1C1C"/>
+                </a:solidFill>
+                <a:latin typeface="Calibri" pitchFamily="34" charset="0"/>
+                <a:ea typeface="Calibri" pitchFamily="34" charset="-122"/>
+                <a:cs typeface="Calibri" pitchFamily="34" charset="-120"/>
+              </a:rPr>
+              <a:t>Необратимое наружу не отдавать без второго подтверждения.</a:t>
+            </a:r>
+            <a:endParaRPr lang="en-US" sz="1800" dirty="0"/>
           </a:p>
         </p:txBody>
       </p:sp>
@@ -6077,8 +6412,8 @@
         </p:nvSpPr>
         <p:spPr>
           <a:xfrm>
-            <a:off x="457200" y="1737360"/>
-            <a:ext cx="457200" cy="365760"/>
+            <a:off x="640080" y="1828800"/>
+            <a:ext cx="411480" cy="365760"/>
           </a:xfrm>
           <a:prstGeom prst="rect">
             <a:avLst/>
@@ -6096,7 +6431,7 @@
             <a:r>
               <a:rPr lang="en-US" sz="1800" dirty="0">
                 <a:solidFill>
-                  <a:srgbClr val="E8C39E"/>
+                  <a:srgbClr val="1F4B6E"/>
                 </a:solidFill>
                 <a:latin typeface="Calibri" pitchFamily="34" charset="0"/>
                 <a:ea typeface="Calibri" pitchFamily="34" charset="-122"/>
@@ -6116,26 +6451,26 @@
         </p:nvSpPr>
         <p:spPr>
           <a:xfrm>
-            <a:off x="1051560" y="1737360"/>
-            <a:ext cx="10424160" cy="548640"/>
-          </a:xfrm>
-          <a:prstGeom prst="rect">
-            <a:avLst/>
-          </a:prstGeom>
-          <a:noFill/>
-          <a:ln/>
-        </p:spPr>
-        <p:txBody>
-          <a:bodyPr wrap="square" lIns="0" tIns="0" rIns="0" bIns="0" rtlCol="0" anchor="ctr"/>
-          <a:lstStyle/>
-          <a:p>
-            <a:pPr indent="0" marL="0">
-              <a:buNone/>
-            </a:pPr>
-            <a:r>
-              <a:rPr lang="en-US" sz="1600" dirty="0">
-                <a:solidFill>
-                  <a:srgbClr val="F4F1EA"/>
+            <a:off x="1188720" y="1828800"/>
+            <a:ext cx="10241280" cy="457200"/>
+          </a:xfrm>
+          <a:prstGeom prst="rect">
+            <a:avLst/>
+          </a:prstGeom>
+          <a:noFill/>
+          <a:ln/>
+        </p:spPr>
+        <p:txBody>
+          <a:bodyPr wrap="square" lIns="0" tIns="0" rIns="0" bIns="0" rtlCol="0" anchor="ctr"/>
+          <a:lstStyle/>
+          <a:p>
+            <a:pPr indent="0" marL="0">
+              <a:buNone/>
+            </a:pPr>
+            <a:r>
+              <a:rPr lang="en-US" sz="1800" dirty="0">
+                <a:solidFill>
+                  <a:srgbClr val="1C1C1C"/>
                 </a:solidFill>
                 <a:latin typeface="Calibri" pitchFamily="34" charset="0"/>
                 <a:ea typeface="Calibri" pitchFamily="34" charset="-122"/>
@@ -6143,7 +6478,7 @@
               </a:rPr>
               <a:t>Карточка поручения вместо запретного списка внутри задачи.</a:t>
             </a:r>
-            <a:endParaRPr lang="en-US" sz="1600" dirty="0"/>
+            <a:endParaRPr lang="en-US" sz="1800" dirty="0"/>
           </a:p>
         </p:txBody>
       </p:sp>
@@ -6155,8 +6490,8 @@
         </p:nvSpPr>
         <p:spPr>
           <a:xfrm>
-            <a:off x="457200" y="2560320"/>
-            <a:ext cx="457200" cy="365760"/>
+            <a:off x="640080" y="2651760"/>
+            <a:ext cx="411480" cy="365760"/>
           </a:xfrm>
           <a:prstGeom prst="rect">
             <a:avLst/>
@@ -6174,7 +6509,7 @@
             <a:r>
               <a:rPr lang="en-US" sz="1800" dirty="0">
                 <a:solidFill>
-                  <a:srgbClr val="E8C39E"/>
+                  <a:srgbClr val="1F4B6E"/>
                 </a:solidFill>
                 <a:latin typeface="Calibri" pitchFamily="34" charset="0"/>
                 <a:ea typeface="Calibri" pitchFamily="34" charset="-122"/>
@@ -6194,26 +6529,26 @@
         </p:nvSpPr>
         <p:spPr>
           <a:xfrm>
-            <a:off x="1051560" y="2560320"/>
-            <a:ext cx="10424160" cy="548640"/>
-          </a:xfrm>
-          <a:prstGeom prst="rect">
-            <a:avLst/>
-          </a:prstGeom>
-          <a:noFill/>
-          <a:ln/>
-        </p:spPr>
-        <p:txBody>
-          <a:bodyPr wrap="square" lIns="0" tIns="0" rIns="0" bIns="0" rtlCol="0" anchor="ctr"/>
-          <a:lstStyle/>
-          <a:p>
-            <a:pPr indent="0" marL="0">
-              <a:buNone/>
-            </a:pPr>
-            <a:r>
-              <a:rPr lang="en-US" sz="1600" dirty="0">
-                <a:solidFill>
-                  <a:srgbClr val="F4F1EA"/>
+            <a:off x="1188720" y="2651760"/>
+            <a:ext cx="10241280" cy="457200"/>
+          </a:xfrm>
+          <a:prstGeom prst="rect">
+            <a:avLst/>
+          </a:prstGeom>
+          <a:noFill/>
+          <a:ln/>
+        </p:spPr>
+        <p:txBody>
+          <a:bodyPr wrap="square" lIns="0" tIns="0" rIns="0" bIns="0" rtlCol="0" anchor="ctr"/>
+          <a:lstStyle/>
+          <a:p>
+            <a:pPr indent="0" marL="0">
+              <a:buNone/>
+            </a:pPr>
+            <a:r>
+              <a:rPr lang="en-US" sz="1800" dirty="0">
+                <a:solidFill>
+                  <a:srgbClr val="1C1C1C"/>
                 </a:solidFill>
                 <a:latin typeface="Calibri" pitchFamily="34" charset="0"/>
                 <a:ea typeface="Calibri" pitchFamily="34" charset="-122"/>
@@ -6221,7 +6556,7 @@
               </a:rPr>
               <a:t>Критик на каждый шаг, человек — на стоп и необратимое.</a:t>
             </a:r>
-            <a:endParaRPr lang="en-US" sz="1600" dirty="0"/>
+            <a:endParaRPr lang="en-US" sz="1800" dirty="0"/>
           </a:p>
         </p:txBody>
       </p:sp>
@@ -6233,8 +6568,8 @@
         </p:nvSpPr>
         <p:spPr>
           <a:xfrm>
-            <a:off x="457200" y="3383280"/>
-            <a:ext cx="457200" cy="365760"/>
+            <a:off x="640080" y="3474720"/>
+            <a:ext cx="411480" cy="365760"/>
           </a:xfrm>
           <a:prstGeom prst="rect">
             <a:avLst/>
@@ -6252,7 +6587,7 @@
             <a:r>
               <a:rPr lang="en-US" sz="1800" dirty="0">
                 <a:solidFill>
-                  <a:srgbClr val="E8C39E"/>
+                  <a:srgbClr val="1F4B6E"/>
                 </a:solidFill>
                 <a:latin typeface="Calibri" pitchFamily="34" charset="0"/>
                 <a:ea typeface="Calibri" pitchFamily="34" charset="-122"/>
@@ -6272,26 +6607,26 @@
         </p:nvSpPr>
         <p:spPr>
           <a:xfrm>
-            <a:off x="1051560" y="3383280"/>
-            <a:ext cx="10424160" cy="548640"/>
-          </a:xfrm>
-          <a:prstGeom prst="rect">
-            <a:avLst/>
-          </a:prstGeom>
-          <a:noFill/>
-          <a:ln/>
-        </p:spPr>
-        <p:txBody>
-          <a:bodyPr wrap="square" lIns="0" tIns="0" rIns="0" bIns="0" rtlCol="0" anchor="ctr"/>
-          <a:lstStyle/>
-          <a:p>
-            <a:pPr indent="0" marL="0">
-              <a:buNone/>
-            </a:pPr>
-            <a:r>
-              <a:rPr lang="en-US" sz="1600" dirty="0">
-                <a:solidFill>
-                  <a:srgbClr val="F4F1EA"/>
+            <a:off x="1188720" y="3474720"/>
+            <a:ext cx="10241280" cy="457200"/>
+          </a:xfrm>
+          <a:prstGeom prst="rect">
+            <a:avLst/>
+          </a:prstGeom>
+          <a:noFill/>
+          <a:ln/>
+        </p:spPr>
+        <p:txBody>
+          <a:bodyPr wrap="square" lIns="0" tIns="0" rIns="0" bIns="0" rtlCol="0" anchor="ctr"/>
+          <a:lstStyle/>
+          <a:p>
+            <a:pPr indent="0" marL="0">
+              <a:buNone/>
+            </a:pPr>
+            <a:r>
+              <a:rPr lang="en-US" sz="1800" dirty="0">
+                <a:solidFill>
+                  <a:srgbClr val="1C1C1C"/>
                 </a:solidFill>
                 <a:latin typeface="Calibri" pitchFamily="34" charset="0"/>
                 <a:ea typeface="Calibri" pitchFamily="34" charset="-122"/>
@@ -6299,7 +6634,7 @@
               </a:rPr>
               <a:t>Петля строитель / атакующий / детектор только в песочнице.</a:t>
             </a:r>
-            <a:endParaRPr lang="en-US" sz="1600" dirty="0"/>
+            <a:endParaRPr lang="en-US" sz="1800" dirty="0"/>
           </a:p>
         </p:txBody>
       </p:sp>
@@ -6311,8 +6646,8 @@
         </p:nvSpPr>
         <p:spPr>
           <a:xfrm>
-            <a:off x="457200" y="4206240"/>
-            <a:ext cx="457200" cy="365760"/>
+            <a:off x="640080" y="4297680"/>
+            <a:ext cx="411480" cy="365760"/>
           </a:xfrm>
           <a:prstGeom prst="rect">
             <a:avLst/>
@@ -6330,7 +6665,7 @@
             <a:r>
               <a:rPr lang="en-US" sz="1800" dirty="0">
                 <a:solidFill>
-                  <a:srgbClr val="E8C39E"/>
+                  <a:srgbClr val="1F4B6E"/>
                 </a:solidFill>
                 <a:latin typeface="Calibri" pitchFamily="34" charset="0"/>
                 <a:ea typeface="Calibri" pitchFamily="34" charset="-122"/>
@@ -6350,26 +6685,26 @@
         </p:nvSpPr>
         <p:spPr>
           <a:xfrm>
-            <a:off x="1051560" y="4206240"/>
-            <a:ext cx="10424160" cy="548640"/>
-          </a:xfrm>
-          <a:prstGeom prst="rect">
-            <a:avLst/>
-          </a:prstGeom>
-          <a:noFill/>
-          <a:ln/>
-        </p:spPr>
-        <p:txBody>
-          <a:bodyPr wrap="square" lIns="0" tIns="0" rIns="0" bIns="0" rtlCol="0" anchor="ctr"/>
-          <a:lstStyle/>
-          <a:p>
-            <a:pPr indent="0" marL="0">
-              <a:buNone/>
-            </a:pPr>
-            <a:r>
-              <a:rPr lang="en-US" sz="1600" dirty="0">
-                <a:solidFill>
-                  <a:srgbClr val="F4F1EA"/>
+            <a:off x="1188720" y="4297680"/>
+            <a:ext cx="10241280" cy="457200"/>
+          </a:xfrm>
+          <a:prstGeom prst="rect">
+            <a:avLst/>
+          </a:prstGeom>
+          <a:noFill/>
+          <a:ln/>
+        </p:spPr>
+        <p:txBody>
+          <a:bodyPr wrap="square" lIns="0" tIns="0" rIns="0" bIns="0" rtlCol="0" anchor="ctr"/>
+          <a:lstStyle/>
+          <a:p>
+            <a:pPr indent="0" marL="0">
+              <a:buNone/>
+            </a:pPr>
+            <a:r>
+              <a:rPr lang="en-US" sz="1800" dirty="0">
+                <a:solidFill>
+                  <a:srgbClr val="1C1C1C"/>
                 </a:solidFill>
                 <a:latin typeface="Calibri" pitchFamily="34" charset="0"/>
                 <a:ea typeface="Calibri" pitchFamily="34" charset="-122"/>
@@ -6377,7 +6712,7 @@
               </a:rPr>
               <a:t>Имя владельца в журнале. «Это нейросеть» не снимает обязанность.</a:t>
             </a:r>
-            <a:endParaRPr lang="en-US" sz="1600" dirty="0"/>
+            <a:endParaRPr lang="en-US" sz="1800" dirty="0"/>
           </a:p>
         </p:txBody>
       </p:sp>
@@ -6389,8 +6724,8 @@
         </p:nvSpPr>
         <p:spPr>
           <a:xfrm>
-            <a:off x="457200" y="5029200"/>
-            <a:ext cx="457200" cy="365760"/>
+            <a:off x="640080" y="5120640"/>
+            <a:ext cx="411480" cy="365760"/>
           </a:xfrm>
           <a:prstGeom prst="rect">
             <a:avLst/>
@@ -6408,7 +6743,7 @@
             <a:r>
               <a:rPr lang="en-US" sz="1800" dirty="0">
                 <a:solidFill>
-                  <a:srgbClr val="E8C39E"/>
+                  <a:srgbClr val="1F4B6E"/>
                 </a:solidFill>
                 <a:latin typeface="Calibri" pitchFamily="34" charset="0"/>
                 <a:ea typeface="Calibri" pitchFamily="34" charset="-122"/>
@@ -6428,26 +6763,26 @@
         </p:nvSpPr>
         <p:spPr>
           <a:xfrm>
-            <a:off x="1051560" y="5029200"/>
-            <a:ext cx="10424160" cy="548640"/>
-          </a:xfrm>
-          <a:prstGeom prst="rect">
-            <a:avLst/>
-          </a:prstGeom>
-          <a:noFill/>
-          <a:ln/>
-        </p:spPr>
-        <p:txBody>
-          <a:bodyPr wrap="square" lIns="0" tIns="0" rIns="0" bIns="0" rtlCol="0" anchor="ctr"/>
-          <a:lstStyle/>
-          <a:p>
-            <a:pPr indent="0" marL="0">
-              <a:buNone/>
-            </a:pPr>
-            <a:r>
-              <a:rPr lang="en-US" sz="1600" dirty="0">
-                <a:solidFill>
-                  <a:srgbClr val="F4F1EA"/>
+            <a:off x="1188720" y="5120640"/>
+            <a:ext cx="10241280" cy="457200"/>
+          </a:xfrm>
+          <a:prstGeom prst="rect">
+            <a:avLst/>
+          </a:prstGeom>
+          <a:noFill/>
+          <a:ln/>
+        </p:spPr>
+        <p:txBody>
+          <a:bodyPr wrap="square" lIns="0" tIns="0" rIns="0" bIns="0" rtlCol="0" anchor="ctr"/>
+          <a:lstStyle/>
+          <a:p>
+            <a:pPr indent="0" marL="0">
+              <a:buNone/>
+            </a:pPr>
+            <a:r>
+              <a:rPr lang="en-US" sz="1800" dirty="0">
+                <a:solidFill>
+                  <a:srgbClr val="1C1C1C"/>
                 </a:solidFill>
                 <a:latin typeface="Calibri" pitchFamily="34" charset="0"/>
                 <a:ea typeface="Calibri" pitchFamily="34" charset="-122"/>
@@ -6455,7 +6790,7 @@
               </a:rPr>
               <a:t>Мерить выход за карточку и ложные остановки, не факт внедрения.</a:t>
             </a:r>
-            <a:endParaRPr lang="en-US" sz="1600" dirty="0"/>
+            <a:endParaRPr lang="en-US" sz="1800" dirty="0"/>
           </a:p>
         </p:txBody>
       </p:sp>
